--- a/deep_learning/3_RNN_NLP/2_NLP_2_Detailed/1_NLP-Application-Challenges.pptx
+++ b/deep_learning/3_RNN_NLP/2_NLP_2_Detailed/1_NLP-Application-Challenges.pptx
@@ -5,10 +5,10 @@
     <p:sldMasterId id="2147483648" r:id="rId1"/>
   </p:sldMasterIdLst>
   <p:notesMasterIdLst>
-    <p:notesMasterId r:id="rId20"/>
+    <p:notesMasterId r:id="rId23"/>
   </p:notesMasterIdLst>
   <p:handoutMasterIdLst>
-    <p:handoutMasterId r:id="rId21"/>
+    <p:handoutMasterId r:id="rId24"/>
   </p:handoutMasterIdLst>
   <p:sldIdLst>
     <p:sldId id="271" r:id="rId2"/>
@@ -25,10 +25,13 @@
     <p:sldId id="288" r:id="rId13"/>
     <p:sldId id="291" r:id="rId14"/>
     <p:sldId id="297" r:id="rId15"/>
-    <p:sldId id="292" r:id="rId16"/>
-    <p:sldId id="294" r:id="rId17"/>
-    <p:sldId id="293" r:id="rId18"/>
-    <p:sldId id="276" r:id="rId19"/>
+    <p:sldId id="299" r:id="rId16"/>
+    <p:sldId id="300" r:id="rId17"/>
+    <p:sldId id="301" r:id="rId18"/>
+    <p:sldId id="302" r:id="rId19"/>
+    <p:sldId id="294" r:id="rId20"/>
+    <p:sldId id="293" r:id="rId21"/>
+    <p:sldId id="276" r:id="rId22"/>
   </p:sldIdLst>
   <p:sldSz cx="12192000" cy="6858000"/>
   <p:notesSz cx="6858000" cy="9144000"/>
@@ -232,7 +235,7 @@
           <a:p>
             <a:fld id="{7BAEECA8-D063-486F-AE31-5020270C1449}" type="datetimeFigureOut">
               <a:rPr lang="en-US" smtClean="0"/>
-              <a:t>4/19/2026</a:t>
+              <a:t>5/2/2026</a:t>
             </a:fld>
             <a:endParaRPr lang="en-US"/>
           </a:p>
@@ -409,7 +412,7 @@
           <a:p>
             <a:fld id="{CB233BD1-3BA8-448D-9D08-7846095EA517}" type="datetimeFigureOut">
               <a:rPr lang="en-US" smtClean="0"/>
-              <a:t>4/19/2026</a:t>
+              <a:t>5/2/2026</a:t>
             </a:fld>
             <a:endParaRPr lang="en-US"/>
           </a:p>
@@ -823,7 +826,7 @@
           <a:p>
             <a:fld id="{6383FAE1-13DE-4511-8C1B-C8AFB720664C}" type="datetimeFigureOut">
               <a:rPr lang="en-US" smtClean="0"/>
-              <a:t>4/19/2026</a:t>
+              <a:t>5/2/2026</a:t>
             </a:fld>
             <a:endParaRPr lang="en-US"/>
           </a:p>
@@ -1021,7 +1024,7 @@
           <a:p>
             <a:fld id="{6383FAE1-13DE-4511-8C1B-C8AFB720664C}" type="datetimeFigureOut">
               <a:rPr lang="en-US" smtClean="0"/>
-              <a:t>4/19/2026</a:t>
+              <a:t>5/2/2026</a:t>
             </a:fld>
             <a:endParaRPr lang="en-US"/>
           </a:p>
@@ -1229,7 +1232,7 @@
           <a:p>
             <a:fld id="{6383FAE1-13DE-4511-8C1B-C8AFB720664C}" type="datetimeFigureOut">
               <a:rPr lang="en-US" smtClean="0"/>
-              <a:t>4/19/2026</a:t>
+              <a:t>5/2/2026</a:t>
             </a:fld>
             <a:endParaRPr lang="en-US"/>
           </a:p>
@@ -1427,7 +1430,7 @@
           <a:p>
             <a:fld id="{6383FAE1-13DE-4511-8C1B-C8AFB720664C}" type="datetimeFigureOut">
               <a:rPr lang="en-US" smtClean="0"/>
-              <a:t>4/19/2026</a:t>
+              <a:t>5/2/2026</a:t>
             </a:fld>
             <a:endParaRPr lang="en-US"/>
           </a:p>
@@ -1702,7 +1705,7 @@
           <a:p>
             <a:fld id="{6383FAE1-13DE-4511-8C1B-C8AFB720664C}" type="datetimeFigureOut">
               <a:rPr lang="en-US" smtClean="0"/>
-              <a:t>4/19/2026</a:t>
+              <a:t>5/2/2026</a:t>
             </a:fld>
             <a:endParaRPr lang="en-US"/>
           </a:p>
@@ -1967,7 +1970,7 @@
           <a:p>
             <a:fld id="{6383FAE1-13DE-4511-8C1B-C8AFB720664C}" type="datetimeFigureOut">
               <a:rPr lang="en-US" smtClean="0"/>
-              <a:t>4/19/2026</a:t>
+              <a:t>5/2/2026</a:t>
             </a:fld>
             <a:endParaRPr lang="en-US"/>
           </a:p>
@@ -2379,7 +2382,7 @@
           <a:p>
             <a:fld id="{6383FAE1-13DE-4511-8C1B-C8AFB720664C}" type="datetimeFigureOut">
               <a:rPr lang="en-US" smtClean="0"/>
-              <a:t>4/19/2026</a:t>
+              <a:t>5/2/2026</a:t>
             </a:fld>
             <a:endParaRPr lang="en-US"/>
           </a:p>
@@ -2520,7 +2523,7 @@
           <a:p>
             <a:fld id="{6383FAE1-13DE-4511-8C1B-C8AFB720664C}" type="datetimeFigureOut">
               <a:rPr lang="en-US" smtClean="0"/>
-              <a:t>4/19/2026</a:t>
+              <a:t>5/2/2026</a:t>
             </a:fld>
             <a:endParaRPr lang="en-US"/>
           </a:p>
@@ -2633,7 +2636,7 @@
           <a:p>
             <a:fld id="{6383FAE1-13DE-4511-8C1B-C8AFB720664C}" type="datetimeFigureOut">
               <a:rPr lang="en-US" smtClean="0"/>
-              <a:t>4/19/2026</a:t>
+              <a:t>5/2/2026</a:t>
             </a:fld>
             <a:endParaRPr lang="en-US"/>
           </a:p>
@@ -2944,7 +2947,7 @@
           <a:p>
             <a:fld id="{6383FAE1-13DE-4511-8C1B-C8AFB720664C}" type="datetimeFigureOut">
               <a:rPr lang="en-US" smtClean="0"/>
-              <a:t>4/19/2026</a:t>
+              <a:t>5/2/2026</a:t>
             </a:fld>
             <a:endParaRPr lang="en-US"/>
           </a:p>
@@ -3235,7 +3238,7 @@
           <a:p>
             <a:fld id="{6383FAE1-13DE-4511-8C1B-C8AFB720664C}" type="datetimeFigureOut">
               <a:rPr lang="en-US" smtClean="0"/>
-              <a:t>4/19/2026</a:t>
+              <a:t>5/2/2026</a:t>
             </a:fld>
             <a:endParaRPr lang="en-US"/>
           </a:p>
@@ -3479,7 +3482,7 @@
           <a:p>
             <a:fld id="{6383FAE1-13DE-4511-8C1B-C8AFB720664C}" type="datetimeFigureOut">
               <a:rPr lang="en-US" smtClean="0"/>
-              <a:t>4/19/2026</a:t>
+              <a:t>5/2/2026</a:t>
             </a:fld>
             <a:endParaRPr lang="en-US"/>
           </a:p>
@@ -4089,7 +4092,7 @@
         <p:spPr>
           <a:xfrm>
             <a:off x="119210" y="413745"/>
-            <a:ext cx="11391464" cy="5262979"/>
+            <a:ext cx="11391464" cy="4893647"/>
           </a:xfrm>
           <a:prstGeom prst="rect">
             <a:avLst/>
@@ -4145,7 +4148,20 @@
                   </a:schemeClr>
                 </a:solidFill>
               </a:rPr>
-              <a:t>It is an unsupervised text mining task that takes a corpus of documents and discovers abstract topics within that corpus. The input to a topic model is a collection of documents, and the output is a list of topics that defines words for each topic as well as assignment proportions of each topic in a document. </a:t>
+              <a:t>It is an unsupervised text mining task that takes a corpus of documents and discovers abstract topics within that corpus. </a:t>
+            </a:r>
+          </a:p>
+          <a:p>
+            <a:r>
+              <a:rPr lang="en-US" sz="2400" dirty="0">
+                <a:solidFill>
+                  <a:schemeClr val="accent6">
+                    <a:lumMod val="60000"/>
+                    <a:lumOff val="40000"/>
+                  </a:schemeClr>
+                </a:solidFill>
+              </a:rPr>
+              <a:t>The input to a topic model is a collection of documents, and the output is a list of topics.</a:t>
             </a:r>
           </a:p>
           <a:p>
@@ -5011,539 +5027,79 @@
       </p:grpSpPr>
       <p:sp>
         <p:nvSpPr>
-          <p:cNvPr id="3" name="Content Placeholder 2">
+          <p:cNvPr id="4" name="TextBox 3">
             <a:extLst>
               <a:ext uri="{FF2B5EF4-FFF2-40B4-BE49-F238E27FC236}">
-                <a16:creationId xmlns:a16="http://schemas.microsoft.com/office/drawing/2014/main" id="{1851E4B9-8445-4B84-CE02-0AC3676F5F61}"/>
+                <a16:creationId xmlns:a16="http://schemas.microsoft.com/office/drawing/2014/main" id="{7324CBC1-7177-D578-F865-09BBE6C47385}"/>
               </a:ext>
             </a:extLst>
           </p:cNvPr>
-          <p:cNvSpPr>
-            <a:spLocks noGrp="1"/>
-          </p:cNvSpPr>
-          <p:nvPr>
-            <p:ph idx="1"/>
-          </p:nvPr>
-        </p:nvSpPr>
-        <p:spPr>
-          <a:xfrm>
-            <a:off x="218198" y="421630"/>
-            <a:ext cx="4697836" cy="5444455"/>
-          </a:xfrm>
-        </p:spPr>
-        <p:txBody>
-          <a:bodyPr>
-            <a:normAutofit fontScale="92500" lnSpcReduction="10000"/>
-          </a:bodyPr>
-          <a:lstStyle/>
-          <a:p>
-            <a:pPr marL="0" indent="0">
-              <a:buNone/>
-            </a:pPr>
-            <a:r>
-              <a:rPr lang="en-US" sz="1600" dirty="0"/>
-              <a:t>1. Ambiguity and Polysemy:</a:t>
-            </a:r>
-          </a:p>
-          <a:p>
-            <a:pPr marL="0" indent="0">
-              <a:buNone/>
-            </a:pPr>
-            <a:r>
-              <a:rPr lang="en-US" sz="1600" b="1" dirty="0"/>
-              <a:t>Issue: </a:t>
-            </a:r>
-            <a:r>
-              <a:rPr lang="en-US" sz="1600" dirty="0"/>
-              <a:t>Natural language is inherently ambiguous, with words and phrases having multiple meanings depending on context. NLP systems need to understand the intended meaning in different situations.</a:t>
-            </a:r>
-          </a:p>
-          <a:p>
-            <a:pPr marL="0" indent="0">
-              <a:buNone/>
-            </a:pPr>
-            <a:r>
-              <a:rPr lang="en-US" sz="1600" b="1" dirty="0"/>
-              <a:t>Example:</a:t>
-            </a:r>
-          </a:p>
-          <a:p>
-            <a:pPr marL="0" indent="0">
-              <a:buNone/>
-            </a:pPr>
-            <a:r>
-              <a:rPr lang="en-US" sz="1600" b="1" dirty="0"/>
-              <a:t>1. Lexical Ambiguity (Polysemy):</a:t>
-            </a:r>
-          </a:p>
-          <a:p>
-            <a:pPr marL="0" indent="0">
-              <a:buNone/>
-            </a:pPr>
-            <a:r>
-              <a:rPr lang="en-US" sz="1600" dirty="0" err="1"/>
-              <a:t>Ritesh</a:t>
-            </a:r>
-            <a:r>
-              <a:rPr lang="en-US" sz="1600" dirty="0"/>
-              <a:t> went to the bank (Institution or beach???)</a:t>
-            </a:r>
-          </a:p>
-          <a:p>
-            <a:pPr marL="0" indent="0">
-              <a:buNone/>
-            </a:pPr>
-            <a:r>
-              <a:rPr lang="en-US" sz="1600" dirty="0" err="1"/>
-              <a:t>Ritesh</a:t>
-            </a:r>
-            <a:r>
-              <a:rPr lang="en-US" sz="1600" dirty="0"/>
-              <a:t> swung the bat in an attempt to hit the flying bat.</a:t>
-            </a:r>
-          </a:p>
-          <a:p>
-            <a:pPr marL="0" indent="0">
-              <a:buNone/>
-            </a:pPr>
-            <a:r>
-              <a:rPr lang="en-US" sz="1600" b="1" dirty="0"/>
-              <a:t>2. Syntactic Ambiguity</a:t>
-            </a:r>
-          </a:p>
-          <a:p>
-            <a:pPr marL="0" indent="0">
-              <a:buNone/>
-            </a:pPr>
-            <a:r>
-              <a:rPr lang="en-US" sz="1600" b="1" dirty="0"/>
-              <a:t>Sentence</a:t>
-            </a:r>
-            <a:r>
-              <a:rPr lang="en-US" sz="1600" dirty="0"/>
-              <a:t>: </a:t>
-            </a:r>
-            <a:r>
-              <a:rPr lang="en-US" sz="1600" i="1" dirty="0"/>
-              <a:t>"I saw the man with the telescope."</a:t>
-            </a:r>
-            <a:endParaRPr lang="en-US" sz="1600" dirty="0"/>
-          </a:p>
-          <a:p>
-            <a:pPr marL="0" indent="0">
-              <a:buNone/>
-            </a:pPr>
-            <a:r>
-              <a:rPr lang="en-US" sz="1600" b="1" dirty="0"/>
-              <a:t>Interpretation 1</a:t>
-            </a:r>
-            <a:r>
-              <a:rPr lang="en-US" sz="1600" dirty="0"/>
-              <a:t>: I used a telescope to see the man.</a:t>
-            </a:r>
-          </a:p>
-          <a:p>
-            <a:pPr marL="0" indent="0">
-              <a:buNone/>
-            </a:pPr>
-            <a:r>
-              <a:rPr lang="en-US" sz="1600" b="1" dirty="0"/>
-              <a:t>Interpretation 2</a:t>
-            </a:r>
-            <a:r>
-              <a:rPr lang="en-US" sz="1600" dirty="0"/>
-              <a:t>: I saw a man who was holding a telescope.</a:t>
-            </a:r>
-          </a:p>
-          <a:p>
-            <a:pPr marL="0" indent="0">
-              <a:buNone/>
-            </a:pPr>
-            <a:r>
-              <a:rPr lang="en-US" sz="1600" b="1" dirty="0"/>
-              <a:t>3. Pragmatic Ambiguity</a:t>
-            </a:r>
-          </a:p>
-          <a:p>
-            <a:pPr marL="0" indent="0">
-              <a:buNone/>
-            </a:pPr>
-            <a:r>
-              <a:rPr lang="en-US" sz="1600" b="1" dirty="0"/>
-              <a:t>Sentence</a:t>
-            </a:r>
-            <a:r>
-              <a:rPr lang="en-US" sz="1600" dirty="0"/>
-              <a:t>: </a:t>
-            </a:r>
-            <a:r>
-              <a:rPr lang="en-US" sz="1600" i="1" dirty="0"/>
-              <a:t>"Can you pass the salt?"</a:t>
-            </a:r>
-            <a:endParaRPr lang="en-US" sz="1600" dirty="0"/>
-          </a:p>
-          <a:p>
-            <a:pPr marL="0" indent="0">
-              <a:buNone/>
-            </a:pPr>
-            <a:r>
-              <a:rPr lang="en-US" sz="1600" dirty="0"/>
-              <a:t>Literally, it's a yes/no question about ability.</a:t>
-            </a:r>
-          </a:p>
-          <a:p>
-            <a:pPr marL="0" indent="0">
-              <a:buNone/>
-            </a:pPr>
-            <a:r>
-              <a:rPr lang="en-US" sz="1600" dirty="0"/>
-              <a:t>Pragmatically, it's a polite request to pass the salt.</a:t>
-            </a:r>
-          </a:p>
-        </p:txBody>
-      </p:sp>
-      <p:sp>
-        <p:nvSpPr>
-          <p:cNvPr id="5" name="Content Placeholder 2">
-            <a:extLst>
-              <a:ext uri="{FF2B5EF4-FFF2-40B4-BE49-F238E27FC236}">
-                <a16:creationId xmlns:a16="http://schemas.microsoft.com/office/drawing/2014/main" id="{AE5D683D-8906-0F0D-ADA9-6816F1CBC1FA}"/>
-              </a:ext>
-            </a:extLst>
-          </p:cNvPr>
-          <p:cNvSpPr txBox="1">
-            <a:spLocks/>
-          </p:cNvSpPr>
+          <p:cNvSpPr txBox="1"/>
           <p:nvPr/>
         </p:nvSpPr>
         <p:spPr>
           <a:xfrm>
-            <a:off x="6913934" y="1058410"/>
-            <a:ext cx="4697836" cy="5444455"/>
+            <a:off x="246888" y="296823"/>
+            <a:ext cx="10771632" cy="5632311"/>
           </a:xfrm>
           <a:prstGeom prst="rect">
             <a:avLst/>
           </a:prstGeom>
+          <a:noFill/>
         </p:spPr>
         <p:txBody>
-          <a:bodyPr vert="horz" lIns="91440" tIns="45720" rIns="91440" bIns="45720" rtlCol="0">
-            <a:normAutofit fontScale="92500" lnSpcReduction="10000"/>
+          <a:bodyPr wrap="square">
+            <a:spAutoFit/>
           </a:bodyPr>
-          <a:lstStyle>
-            <a:lvl1pPr marL="228600" indent="-228600" algn="l" defTabSz="914400" rtl="0" eaLnBrk="1" latinLnBrk="0" hangingPunct="1">
-              <a:lnSpc>
-                <a:spcPct val="90000"/>
-              </a:lnSpc>
-              <a:spcBef>
-                <a:spcPts val="1000"/>
-              </a:spcBef>
-              <a:buFont typeface="Arial" panose="020B0604020202020204" pitchFamily="34" charset="0"/>
-              <a:buChar char="•"/>
-              <a:defRPr sz="2800" kern="1200">
-                <a:solidFill>
-                  <a:schemeClr val="tx1"/>
-                </a:solidFill>
-                <a:latin typeface="+mn-lt"/>
-                <a:ea typeface="+mn-ea"/>
-                <a:cs typeface="+mn-cs"/>
-              </a:defRPr>
-            </a:lvl1pPr>
-            <a:lvl2pPr marL="685800" indent="-228600" algn="l" defTabSz="914400" rtl="0" eaLnBrk="1" latinLnBrk="0" hangingPunct="1">
-              <a:lnSpc>
-                <a:spcPct val="90000"/>
-              </a:lnSpc>
-              <a:spcBef>
-                <a:spcPts val="500"/>
-              </a:spcBef>
-              <a:buFont typeface="Arial" panose="020B0604020202020204" pitchFamily="34" charset="0"/>
-              <a:buChar char="•"/>
-              <a:defRPr sz="2400" kern="1200">
-                <a:solidFill>
-                  <a:schemeClr val="tx1"/>
-                </a:solidFill>
-                <a:latin typeface="+mn-lt"/>
-                <a:ea typeface="+mn-ea"/>
-                <a:cs typeface="+mn-cs"/>
-              </a:defRPr>
-            </a:lvl2pPr>
-            <a:lvl3pPr marL="1143000" indent="-228600" algn="l" defTabSz="914400" rtl="0" eaLnBrk="1" latinLnBrk="0" hangingPunct="1">
-              <a:lnSpc>
-                <a:spcPct val="90000"/>
-              </a:lnSpc>
-              <a:spcBef>
-                <a:spcPts val="500"/>
-              </a:spcBef>
-              <a:buFont typeface="Arial" panose="020B0604020202020204" pitchFamily="34" charset="0"/>
-              <a:buChar char="•"/>
-              <a:defRPr sz="2000" kern="1200">
-                <a:solidFill>
-                  <a:schemeClr val="tx1"/>
-                </a:solidFill>
-                <a:latin typeface="+mn-lt"/>
-                <a:ea typeface="+mn-ea"/>
-                <a:cs typeface="+mn-cs"/>
-              </a:defRPr>
-            </a:lvl3pPr>
-            <a:lvl4pPr marL="1600200" indent="-228600" algn="l" defTabSz="914400" rtl="0" eaLnBrk="1" latinLnBrk="0" hangingPunct="1">
-              <a:lnSpc>
-                <a:spcPct val="90000"/>
-              </a:lnSpc>
-              <a:spcBef>
-                <a:spcPts val="500"/>
-              </a:spcBef>
-              <a:buFont typeface="Arial" panose="020B0604020202020204" pitchFamily="34" charset="0"/>
-              <a:buChar char="•"/>
-              <a:defRPr sz="1800" kern="1200">
-                <a:solidFill>
-                  <a:schemeClr val="tx1"/>
-                </a:solidFill>
-                <a:latin typeface="+mn-lt"/>
-                <a:ea typeface="+mn-ea"/>
-                <a:cs typeface="+mn-cs"/>
-              </a:defRPr>
-            </a:lvl4pPr>
-            <a:lvl5pPr marL="2057400" indent="-228600" algn="l" defTabSz="914400" rtl="0" eaLnBrk="1" latinLnBrk="0" hangingPunct="1">
-              <a:lnSpc>
-                <a:spcPct val="90000"/>
-              </a:lnSpc>
-              <a:spcBef>
-                <a:spcPts val="500"/>
-              </a:spcBef>
-              <a:buFont typeface="Arial" panose="020B0604020202020204" pitchFamily="34" charset="0"/>
-              <a:buChar char="•"/>
-              <a:defRPr sz="1800" kern="1200">
-                <a:solidFill>
-                  <a:schemeClr val="tx1"/>
-                </a:solidFill>
-                <a:latin typeface="+mn-lt"/>
-                <a:ea typeface="+mn-ea"/>
-                <a:cs typeface="+mn-cs"/>
-              </a:defRPr>
-            </a:lvl5pPr>
-            <a:lvl6pPr marL="2514600" indent="-228600" algn="l" defTabSz="914400" rtl="0" eaLnBrk="1" latinLnBrk="0" hangingPunct="1">
-              <a:lnSpc>
-                <a:spcPct val="90000"/>
-              </a:lnSpc>
-              <a:spcBef>
-                <a:spcPts val="500"/>
-              </a:spcBef>
-              <a:buFont typeface="Arial" panose="020B0604020202020204" pitchFamily="34" charset="0"/>
-              <a:buChar char="•"/>
-              <a:defRPr sz="1800" kern="1200">
-                <a:solidFill>
-                  <a:schemeClr val="tx1"/>
-                </a:solidFill>
-                <a:latin typeface="+mn-lt"/>
-                <a:ea typeface="+mn-ea"/>
-                <a:cs typeface="+mn-cs"/>
-              </a:defRPr>
-            </a:lvl6pPr>
-            <a:lvl7pPr marL="2971800" indent="-228600" algn="l" defTabSz="914400" rtl="0" eaLnBrk="1" latinLnBrk="0" hangingPunct="1">
-              <a:lnSpc>
-                <a:spcPct val="90000"/>
-              </a:lnSpc>
-              <a:spcBef>
-                <a:spcPts val="500"/>
-              </a:spcBef>
-              <a:buFont typeface="Arial" panose="020B0604020202020204" pitchFamily="34" charset="0"/>
-              <a:buChar char="•"/>
-              <a:defRPr sz="1800" kern="1200">
-                <a:solidFill>
-                  <a:schemeClr val="tx1"/>
-                </a:solidFill>
-                <a:latin typeface="+mn-lt"/>
-                <a:ea typeface="+mn-ea"/>
-                <a:cs typeface="+mn-cs"/>
-              </a:defRPr>
-            </a:lvl7pPr>
-            <a:lvl8pPr marL="3429000" indent="-228600" algn="l" defTabSz="914400" rtl="0" eaLnBrk="1" latinLnBrk="0" hangingPunct="1">
-              <a:lnSpc>
-                <a:spcPct val="90000"/>
-              </a:lnSpc>
-              <a:spcBef>
-                <a:spcPts val="500"/>
-              </a:spcBef>
-              <a:buFont typeface="Arial" panose="020B0604020202020204" pitchFamily="34" charset="0"/>
-              <a:buChar char="•"/>
-              <a:defRPr sz="1800" kern="1200">
-                <a:solidFill>
-                  <a:schemeClr val="tx1"/>
-                </a:solidFill>
-                <a:latin typeface="+mn-lt"/>
-                <a:ea typeface="+mn-ea"/>
-                <a:cs typeface="+mn-cs"/>
-              </a:defRPr>
-            </a:lvl8pPr>
-            <a:lvl9pPr marL="3886200" indent="-228600" algn="l" defTabSz="914400" rtl="0" eaLnBrk="1" latinLnBrk="0" hangingPunct="1">
-              <a:lnSpc>
-                <a:spcPct val="90000"/>
-              </a:lnSpc>
-              <a:spcBef>
-                <a:spcPts val="500"/>
-              </a:spcBef>
-              <a:buFont typeface="Arial" panose="020B0604020202020204" pitchFamily="34" charset="0"/>
-              <a:buChar char="•"/>
-              <a:defRPr sz="1800" kern="1200">
-                <a:solidFill>
-                  <a:schemeClr val="tx1"/>
-                </a:solidFill>
-                <a:latin typeface="+mn-lt"/>
-                <a:ea typeface="+mn-ea"/>
-                <a:cs typeface="+mn-cs"/>
-              </a:defRPr>
-            </a:lvl9pPr>
-          </a:lstStyle>
+          <a:lstStyle/>
           <a:p>
             <a:pPr marL="0" indent="0">
-              <a:buFont typeface="Arial" panose="020B0604020202020204" pitchFamily="34" charset="0"/>
               <a:buNone/>
             </a:pPr>
             <a:r>
-              <a:rPr lang="en-US" sz="1600" b="1" dirty="0">
-                <a:solidFill>
-                  <a:schemeClr val="accent6">
-                    <a:lumMod val="60000"/>
-                    <a:lumOff val="40000"/>
-                  </a:schemeClr>
-                </a:solidFill>
-              </a:rPr>
-              <a:t>4. Punctuation ambiguity</a:t>
+              <a:rPr lang="en-US" sz="2400" dirty="0">
+                <a:solidFill>
+                  <a:schemeClr val="accent6">
+                    <a:lumMod val="60000"/>
+                    <a:lumOff val="40000"/>
+                  </a:schemeClr>
+                </a:solidFill>
+              </a:rPr>
+              <a:t>1. Ambiguity and Polysemy:</a:t>
             </a:r>
           </a:p>
           <a:p>
             <a:pPr marL="0" indent="0">
-              <a:buFont typeface="Arial" panose="020B0604020202020204" pitchFamily="34" charset="0"/>
               <a:buNone/>
             </a:pPr>
             <a:r>
-              <a:rPr lang="en-US" sz="1600" dirty="0">
-                <a:solidFill>
-                  <a:schemeClr val="accent6">
-                    <a:lumMod val="60000"/>
-                    <a:lumOff val="40000"/>
-                  </a:schemeClr>
-                </a:solidFill>
-              </a:rPr>
-              <a:t>She found inspiration in cooking, her family, and her dog (right meaning)</a:t>
+              <a:rPr lang="en-US" sz="2400" b="1" dirty="0">
+                <a:solidFill>
+                  <a:schemeClr val="accent6">
+                    <a:lumMod val="60000"/>
+                    <a:lumOff val="40000"/>
+                  </a:schemeClr>
+                </a:solidFill>
+              </a:rPr>
+              <a:t>Issue: </a:t>
+            </a:r>
+            <a:r>
+              <a:rPr lang="en-US" sz="2400" dirty="0">
+                <a:solidFill>
+                  <a:schemeClr val="accent6">
+                    <a:lumMod val="60000"/>
+                    <a:lumOff val="40000"/>
+                  </a:schemeClr>
+                </a:solidFill>
+              </a:rPr>
+              <a:t>Natural language is inherently ambiguous, with words and phrases having multiple meanings depending on context. NLP systems need to understand the intended meaning in different situations.</a:t>
             </a:r>
           </a:p>
           <a:p>
             <a:pPr marL="0" indent="0">
-              <a:buFont typeface="Arial" panose="020B0604020202020204" pitchFamily="34" charset="0"/>
               <a:buNone/>
             </a:pPr>
-            <a:r>
-              <a:rPr lang="en-US" sz="1600" dirty="0">
-                <a:solidFill>
-                  <a:schemeClr val="accent6">
-                    <a:lumMod val="60000"/>
-                    <a:lumOff val="40000"/>
-                  </a:schemeClr>
-                </a:solidFill>
-              </a:rPr>
-              <a:t>She found inspiration in cooking her family and her dog (weird meaning)</a:t>
-            </a:r>
-          </a:p>
-          <a:p>
-            <a:pPr marL="0" indent="0">
-              <a:buFont typeface="Arial" panose="020B0604020202020204" pitchFamily="34" charset="0"/>
-              <a:buNone/>
-            </a:pPr>
-            <a:r>
-              <a:rPr lang="en-US" sz="1600" b="1" dirty="0">
-                <a:solidFill>
-                  <a:schemeClr val="accent6">
-                    <a:lumMod val="60000"/>
-                    <a:lumOff val="40000"/>
-                  </a:schemeClr>
-                </a:solidFill>
-              </a:rPr>
-              <a:t>5. Slang</a:t>
-            </a:r>
-          </a:p>
-          <a:p>
-            <a:pPr marL="0" indent="0">
-              <a:buFont typeface="Arial" panose="020B0604020202020204" pitchFamily="34" charset="0"/>
-              <a:buNone/>
-            </a:pPr>
-            <a:r>
-              <a:rPr lang="en-US" sz="1600" dirty="0">
-                <a:solidFill>
-                  <a:schemeClr val="accent6">
-                    <a:lumMod val="60000"/>
-                    <a:lumOff val="40000"/>
-                  </a:schemeClr>
-                </a:solidFill>
-              </a:rPr>
-              <a:t>Sentence: "Dude your pants are on fire!"</a:t>
-            </a:r>
-          </a:p>
-          <a:p>
-            <a:pPr marL="0" indent="0">
-              <a:buFont typeface="Arial" panose="020B0604020202020204" pitchFamily="34" charset="0"/>
-              <a:buNone/>
-            </a:pPr>
-            <a:r>
-              <a:rPr lang="en-US" sz="1600" dirty="0">
-                <a:solidFill>
-                  <a:schemeClr val="accent6">
-                    <a:lumMod val="60000"/>
-                    <a:lumOff val="40000"/>
-                  </a:schemeClr>
-                </a:solidFill>
-              </a:rPr>
-              <a:t>Literal interpretation: pants are on fire.</a:t>
-            </a:r>
-          </a:p>
-          <a:p>
-            <a:pPr marL="0" indent="0">
-              <a:buFont typeface="Arial" panose="020B0604020202020204" pitchFamily="34" charset="0"/>
-              <a:buNone/>
-            </a:pPr>
-            <a:r>
-              <a:rPr lang="en-US" sz="1600" dirty="0">
-                <a:solidFill>
-                  <a:schemeClr val="accent6">
-                    <a:lumMod val="60000"/>
-                    <a:lumOff val="40000"/>
-                  </a:schemeClr>
-                </a:solidFill>
-              </a:rPr>
-              <a:t>Slang meaning: The pants was amazing or pants have design depicting fire</a:t>
-            </a:r>
-          </a:p>
-          <a:p>
-            <a:pPr marL="0" indent="0">
-              <a:buNone/>
-            </a:pPr>
-            <a:r>
-              <a:rPr lang="en-US" sz="1600" b="1" dirty="0">
-                <a:solidFill>
-                  <a:schemeClr val="accent6">
-                    <a:lumMod val="60000"/>
-                    <a:lumOff val="40000"/>
-                  </a:schemeClr>
-                </a:solidFill>
-              </a:rPr>
-              <a:t>6. Sarcasm Ambiguity</a:t>
-            </a:r>
-          </a:p>
-          <a:p>
-            <a:pPr marL="0" indent="0">
-              <a:buNone/>
-            </a:pPr>
-            <a:r>
-              <a:rPr lang="en-US" sz="1600" i="1" dirty="0">
-                <a:solidFill>
-                  <a:schemeClr val="accent6">
-                    <a:lumMod val="60000"/>
-                    <a:lumOff val="40000"/>
-                  </a:schemeClr>
-                </a:solidFill>
-              </a:rPr>
-              <a:t>"Oh great, another Monday. I’m so excited."</a:t>
-            </a:r>
-            <a:endParaRPr lang="en-US" sz="1600" dirty="0">
+            <a:endParaRPr lang="en-US" sz="2400" dirty="0">
               <a:solidFill>
                 <a:schemeClr val="accent6">
                   <a:lumMod val="60000"/>
@@ -5557,15 +5113,15 @@
               <a:buNone/>
             </a:pPr>
             <a:r>
-              <a:rPr lang="en-US" sz="1600" dirty="0">
-                <a:solidFill>
-                  <a:schemeClr val="accent6">
-                    <a:lumMod val="60000"/>
-                    <a:lumOff val="40000"/>
-                  </a:schemeClr>
-                </a:solidFill>
-              </a:rPr>
-              <a:t>Literal meaning: The speaker is excited.</a:t>
+              <a:rPr lang="en-US" sz="2400" b="1" dirty="0">
+                <a:solidFill>
+                  <a:schemeClr val="accent6">
+                    <a:lumMod val="60000"/>
+                    <a:lumOff val="40000"/>
+                  </a:schemeClr>
+                </a:solidFill>
+              </a:rPr>
+              <a:t>Example:</a:t>
             </a:r>
           </a:p>
           <a:p>
@@ -5573,15 +5129,15 @@
               <a:buNone/>
             </a:pPr>
             <a:r>
-              <a:rPr lang="en-US" sz="1600" dirty="0">
-                <a:solidFill>
-                  <a:schemeClr val="accent6">
-                    <a:lumMod val="60000"/>
-                    <a:lumOff val="40000"/>
-                  </a:schemeClr>
-                </a:solidFill>
-              </a:rPr>
-              <a:t>Actual (sarcastic) meaning: The speaker dreads it.</a:t>
+              <a:rPr lang="en-US" sz="2400" b="1" dirty="0">
+                <a:solidFill>
+                  <a:schemeClr val="accent6">
+                    <a:lumMod val="60000"/>
+                    <a:lumOff val="40000"/>
+                  </a:schemeClr>
+                </a:solidFill>
+              </a:rPr>
+              <a:t>a) Lexical Ambiguity (Polysemy):</a:t>
             </a:r>
           </a:p>
           <a:p>
@@ -5589,15 +5145,15 @@
               <a:buNone/>
             </a:pPr>
             <a:r>
-              <a:rPr lang="en-US" sz="1600" b="1" dirty="0">
-                <a:solidFill>
-                  <a:schemeClr val="accent6">
-                    <a:lumMod val="60000"/>
-                    <a:lumOff val="40000"/>
-                  </a:schemeClr>
-                </a:solidFill>
-              </a:rPr>
-              <a:t>7. Spelling mistake:</a:t>
+              <a:rPr lang="en-US" sz="2400" dirty="0">
+                <a:solidFill>
+                  <a:schemeClr val="accent6">
+                    <a:lumMod val="60000"/>
+                    <a:lumOff val="40000"/>
+                  </a:schemeClr>
+                </a:solidFill>
+              </a:rPr>
+              <a:t>Ritesh went to the bank (Institution or beach???)</a:t>
             </a:r>
           </a:p>
           <a:p>
@@ -5605,23 +5161,22 @@
               <a:buNone/>
             </a:pPr>
             <a:r>
-              <a:rPr lang="en-US" sz="1600" dirty="0">
-                <a:solidFill>
-                  <a:schemeClr val="accent6">
-                    <a:lumMod val="60000"/>
-                    <a:lumOff val="40000"/>
-                  </a:schemeClr>
-                </a:solidFill>
-              </a:rPr>
-              <a:t>"I cleaned the horse all morning.“….meant house</a:t>
+              <a:rPr lang="en-US" sz="2400" dirty="0">
+                <a:solidFill>
+                  <a:schemeClr val="accent6">
+                    <a:lumMod val="60000"/>
+                    <a:lumOff val="40000"/>
+                  </a:schemeClr>
+                </a:solidFill>
+              </a:rPr>
+              <a:t>Ritesh swung the bat in an attempt to hit the flying bat.</a:t>
             </a:r>
           </a:p>
           <a:p>
             <a:pPr marL="0" indent="0">
-              <a:buFont typeface="Arial" panose="020B0604020202020204" pitchFamily="34" charset="0"/>
               <a:buNone/>
             </a:pPr>
-            <a:endParaRPr lang="en-US" sz="1600" dirty="0">
+            <a:endParaRPr lang="en-US" sz="2400" dirty="0">
               <a:solidFill>
                 <a:schemeClr val="accent6">
                   <a:lumMod val="60000"/>
@@ -5632,38 +5187,125 @@
           </a:p>
           <a:p>
             <a:pPr marL="0" indent="0">
-              <a:buFont typeface="Arial" panose="020B0604020202020204" pitchFamily="34" charset="0"/>
               <a:buNone/>
             </a:pPr>
             <a:r>
-              <a:rPr lang="en-US" sz="1600" b="1" dirty="0">
-                <a:solidFill>
-                  <a:schemeClr val="accent6">
-                    <a:lumMod val="60000"/>
-                    <a:lumOff val="40000"/>
-                  </a:schemeClr>
-                </a:solidFill>
-              </a:rPr>
-              <a:t>Solution: </a:t>
-            </a:r>
-            <a:r>
-              <a:rPr lang="en-US" sz="1600" dirty="0">
-                <a:solidFill>
-                  <a:schemeClr val="accent6">
-                    <a:lumMod val="60000"/>
-                    <a:lumOff val="40000"/>
-                  </a:schemeClr>
-                </a:solidFill>
-              </a:rPr>
-              <a:t>Developing models that can accurately discern context and resolve ambiguities. </a:t>
+              <a:rPr lang="en-US" sz="2400" b="1" dirty="0">
+                <a:solidFill>
+                  <a:schemeClr val="accent6">
+                    <a:lumMod val="60000"/>
+                    <a:lumOff val="40000"/>
+                  </a:schemeClr>
+                </a:solidFill>
+              </a:rPr>
+              <a:t>b) Syntactic Ambiguity</a:t>
             </a:r>
           </a:p>
           <a:p>
             <a:pPr marL="0" indent="0">
-              <a:buFont typeface="Arial" panose="020B0604020202020204" pitchFamily="34" charset="0"/>
               <a:buNone/>
             </a:pPr>
-            <a:endParaRPr lang="en-US" sz="1600" dirty="0">
+            <a:r>
+              <a:rPr lang="en-US" sz="2400" b="1" dirty="0">
+                <a:solidFill>
+                  <a:schemeClr val="accent6">
+                    <a:lumMod val="60000"/>
+                    <a:lumOff val="40000"/>
+                  </a:schemeClr>
+                </a:solidFill>
+              </a:rPr>
+              <a:t>Sentence</a:t>
+            </a:r>
+            <a:r>
+              <a:rPr lang="en-US" sz="2400" dirty="0">
+                <a:solidFill>
+                  <a:schemeClr val="accent6">
+                    <a:lumMod val="60000"/>
+                    <a:lumOff val="40000"/>
+                  </a:schemeClr>
+                </a:solidFill>
+              </a:rPr>
+              <a:t>: </a:t>
+            </a:r>
+            <a:r>
+              <a:rPr lang="en-US" sz="2400" i="1" dirty="0">
+                <a:solidFill>
+                  <a:schemeClr val="accent6">
+                    <a:lumMod val="60000"/>
+                    <a:lumOff val="40000"/>
+                  </a:schemeClr>
+                </a:solidFill>
+              </a:rPr>
+              <a:t>"I saw the man with the telescope."</a:t>
+            </a:r>
+            <a:endParaRPr lang="en-US" sz="2400" dirty="0">
+              <a:solidFill>
+                <a:schemeClr val="accent6">
+                  <a:lumMod val="60000"/>
+                  <a:lumOff val="40000"/>
+                </a:schemeClr>
+              </a:solidFill>
+            </a:endParaRPr>
+          </a:p>
+          <a:p>
+            <a:pPr marL="0" indent="0">
+              <a:buNone/>
+            </a:pPr>
+            <a:r>
+              <a:rPr lang="en-US" sz="2400" b="1" dirty="0">
+                <a:solidFill>
+                  <a:schemeClr val="accent6">
+                    <a:lumMod val="60000"/>
+                    <a:lumOff val="40000"/>
+                  </a:schemeClr>
+                </a:solidFill>
+              </a:rPr>
+              <a:t>Interpretation 1</a:t>
+            </a:r>
+            <a:r>
+              <a:rPr lang="en-US" sz="2400" dirty="0">
+                <a:solidFill>
+                  <a:schemeClr val="accent6">
+                    <a:lumMod val="60000"/>
+                    <a:lumOff val="40000"/>
+                  </a:schemeClr>
+                </a:solidFill>
+              </a:rPr>
+              <a:t>: I used a telescope to see the man.</a:t>
+            </a:r>
+          </a:p>
+          <a:p>
+            <a:pPr marL="0" indent="0">
+              <a:buNone/>
+            </a:pPr>
+            <a:r>
+              <a:rPr lang="en-US" sz="2400" b="1" dirty="0">
+                <a:solidFill>
+                  <a:schemeClr val="accent6">
+                    <a:lumMod val="60000"/>
+                    <a:lumOff val="40000"/>
+                  </a:schemeClr>
+                </a:solidFill>
+              </a:rPr>
+              <a:t>Interpretation 2</a:t>
+            </a:r>
+            <a:r>
+              <a:rPr lang="en-US" sz="2400" dirty="0">
+                <a:solidFill>
+                  <a:schemeClr val="accent6">
+                    <a:lumMod val="60000"/>
+                    <a:lumOff val="40000"/>
+                  </a:schemeClr>
+                </a:solidFill>
+              </a:rPr>
+              <a:t>: I saw a man who was holding a telescope.</a:t>
+            </a:r>
+          </a:p>
+          <a:p>
+            <a:pPr marL="0" indent="0">
+              <a:buNone/>
+            </a:pPr>
+            <a:endParaRPr lang="en-US" sz="2400" dirty="0">
               <a:solidFill>
                 <a:schemeClr val="accent6">
                   <a:lumMod val="60000"/>
@@ -5692,7 +5334,13 @@
   <p:cSld>
     <p:spTree>
       <p:nvGrpSpPr>
-        <p:cNvPr id="1" name=""/>
+        <p:cNvPr id="1" name="">
+          <a:extLst>
+            <a:ext uri="{FF2B5EF4-FFF2-40B4-BE49-F238E27FC236}">
+              <a16:creationId xmlns:a16="http://schemas.microsoft.com/office/drawing/2014/main" id="{2FC20ACF-054F-96C3-66EA-7E69AD195C08}"/>
+            </a:ext>
+          </a:extLst>
+        </p:cNvPr>
         <p:cNvGrpSpPr/>
         <p:nvPr/>
       </p:nvGrpSpPr>
@@ -5706,61 +5354,209 @@
       </p:grpSpPr>
       <p:sp>
         <p:nvSpPr>
-          <p:cNvPr id="2" name="Title 1"/>
-          <p:cNvSpPr>
-            <a:spLocks noGrp="1"/>
+          <p:cNvPr id="5" name="Content Placeholder 2">
+            <a:extLst>
+              <a:ext uri="{FF2B5EF4-FFF2-40B4-BE49-F238E27FC236}">
+                <a16:creationId xmlns:a16="http://schemas.microsoft.com/office/drawing/2014/main" id="{707E582D-B6F3-2D08-73A8-40532A337AB1}"/>
+              </a:ext>
+            </a:extLst>
+          </p:cNvPr>
+          <p:cNvSpPr txBox="1">
+            <a:spLocks/>
           </p:cNvSpPr>
-          <p:nvPr>
-            <p:ph type="title"/>
-          </p:nvPr>
+          <p:nvPr/>
         </p:nvSpPr>
         <p:spPr>
           <a:xfrm>
-            <a:off x="838200" y="365126"/>
-            <a:ext cx="5319319" cy="675110"/>
+            <a:off x="201168" y="226306"/>
+            <a:ext cx="11191146" cy="7235198"/>
           </a:xfrm>
+          <a:prstGeom prst="rect">
+            <a:avLst/>
+          </a:prstGeom>
         </p:spPr>
         <p:txBody>
-          <a:bodyPr>
-            <a:normAutofit fontScale="90000"/>
+          <a:bodyPr vert="horz" lIns="91440" tIns="45720" rIns="91440" bIns="45720" rtlCol="0">
+            <a:noAutofit/>
           </a:bodyPr>
-          <a:lstStyle/>
-          <a:p>
-            <a:r>
-              <a:rPr lang="en-US" dirty="0"/>
-              <a:t>NLP challenges(p2)</a:t>
-            </a:r>
-          </a:p>
-        </p:txBody>
-      </p:sp>
-      <p:sp>
-        <p:nvSpPr>
-          <p:cNvPr id="3" name="Content Placeholder 2"/>
-          <p:cNvSpPr>
-            <a:spLocks noGrp="1"/>
-          </p:cNvSpPr>
-          <p:nvPr>
-            <p:ph idx="1"/>
-          </p:nvPr>
-        </p:nvSpPr>
-        <p:spPr>
-          <a:xfrm>
-            <a:off x="318781" y="1481676"/>
-            <a:ext cx="11610363" cy="4351338"/>
-          </a:xfrm>
-        </p:spPr>
-        <p:txBody>
-          <a:bodyPr>
-            <a:normAutofit fontScale="55000" lnSpcReduction="20000"/>
-          </a:bodyPr>
-          <a:lstStyle/>
+          <a:lstStyle>
+            <a:lvl1pPr marL="228600" indent="-228600" algn="l" defTabSz="914400" rtl="0" eaLnBrk="1" latinLnBrk="0" hangingPunct="1">
+              <a:lnSpc>
+                <a:spcPct val="90000"/>
+              </a:lnSpc>
+              <a:spcBef>
+                <a:spcPts val="1000"/>
+              </a:spcBef>
+              <a:buFont typeface="Arial" panose="020B0604020202020204" pitchFamily="34" charset="0"/>
+              <a:buChar char="•"/>
+              <a:defRPr sz="2800" kern="1200">
+                <a:solidFill>
+                  <a:schemeClr val="tx1"/>
+                </a:solidFill>
+                <a:latin typeface="+mn-lt"/>
+                <a:ea typeface="+mn-ea"/>
+                <a:cs typeface="+mn-cs"/>
+              </a:defRPr>
+            </a:lvl1pPr>
+            <a:lvl2pPr marL="685800" indent="-228600" algn="l" defTabSz="914400" rtl="0" eaLnBrk="1" latinLnBrk="0" hangingPunct="1">
+              <a:lnSpc>
+                <a:spcPct val="90000"/>
+              </a:lnSpc>
+              <a:spcBef>
+                <a:spcPts val="500"/>
+              </a:spcBef>
+              <a:buFont typeface="Arial" panose="020B0604020202020204" pitchFamily="34" charset="0"/>
+              <a:buChar char="•"/>
+              <a:defRPr sz="2400" kern="1200">
+                <a:solidFill>
+                  <a:schemeClr val="tx1"/>
+                </a:solidFill>
+                <a:latin typeface="+mn-lt"/>
+                <a:ea typeface="+mn-ea"/>
+                <a:cs typeface="+mn-cs"/>
+              </a:defRPr>
+            </a:lvl2pPr>
+            <a:lvl3pPr marL="1143000" indent="-228600" algn="l" defTabSz="914400" rtl="0" eaLnBrk="1" latinLnBrk="0" hangingPunct="1">
+              <a:lnSpc>
+                <a:spcPct val="90000"/>
+              </a:lnSpc>
+              <a:spcBef>
+                <a:spcPts val="500"/>
+              </a:spcBef>
+              <a:buFont typeface="Arial" panose="020B0604020202020204" pitchFamily="34" charset="0"/>
+              <a:buChar char="•"/>
+              <a:defRPr sz="2000" kern="1200">
+                <a:solidFill>
+                  <a:schemeClr val="tx1"/>
+                </a:solidFill>
+                <a:latin typeface="+mn-lt"/>
+                <a:ea typeface="+mn-ea"/>
+                <a:cs typeface="+mn-cs"/>
+              </a:defRPr>
+            </a:lvl3pPr>
+            <a:lvl4pPr marL="1600200" indent="-228600" algn="l" defTabSz="914400" rtl="0" eaLnBrk="1" latinLnBrk="0" hangingPunct="1">
+              <a:lnSpc>
+                <a:spcPct val="90000"/>
+              </a:lnSpc>
+              <a:spcBef>
+                <a:spcPts val="500"/>
+              </a:spcBef>
+              <a:buFont typeface="Arial" panose="020B0604020202020204" pitchFamily="34" charset="0"/>
+              <a:buChar char="•"/>
+              <a:defRPr sz="1800" kern="1200">
+                <a:solidFill>
+                  <a:schemeClr val="tx1"/>
+                </a:solidFill>
+                <a:latin typeface="+mn-lt"/>
+                <a:ea typeface="+mn-ea"/>
+                <a:cs typeface="+mn-cs"/>
+              </a:defRPr>
+            </a:lvl4pPr>
+            <a:lvl5pPr marL="2057400" indent="-228600" algn="l" defTabSz="914400" rtl="0" eaLnBrk="1" latinLnBrk="0" hangingPunct="1">
+              <a:lnSpc>
+                <a:spcPct val="90000"/>
+              </a:lnSpc>
+              <a:spcBef>
+                <a:spcPts val="500"/>
+              </a:spcBef>
+              <a:buFont typeface="Arial" panose="020B0604020202020204" pitchFamily="34" charset="0"/>
+              <a:buChar char="•"/>
+              <a:defRPr sz="1800" kern="1200">
+                <a:solidFill>
+                  <a:schemeClr val="tx1"/>
+                </a:solidFill>
+                <a:latin typeface="+mn-lt"/>
+                <a:ea typeface="+mn-ea"/>
+                <a:cs typeface="+mn-cs"/>
+              </a:defRPr>
+            </a:lvl5pPr>
+            <a:lvl6pPr marL="2514600" indent="-228600" algn="l" defTabSz="914400" rtl="0" eaLnBrk="1" latinLnBrk="0" hangingPunct="1">
+              <a:lnSpc>
+                <a:spcPct val="90000"/>
+              </a:lnSpc>
+              <a:spcBef>
+                <a:spcPts val="500"/>
+              </a:spcBef>
+              <a:buFont typeface="Arial" panose="020B0604020202020204" pitchFamily="34" charset="0"/>
+              <a:buChar char="•"/>
+              <a:defRPr sz="1800" kern="1200">
+                <a:solidFill>
+                  <a:schemeClr val="tx1"/>
+                </a:solidFill>
+                <a:latin typeface="+mn-lt"/>
+                <a:ea typeface="+mn-ea"/>
+                <a:cs typeface="+mn-cs"/>
+              </a:defRPr>
+            </a:lvl6pPr>
+            <a:lvl7pPr marL="2971800" indent="-228600" algn="l" defTabSz="914400" rtl="0" eaLnBrk="1" latinLnBrk="0" hangingPunct="1">
+              <a:lnSpc>
+                <a:spcPct val="90000"/>
+              </a:lnSpc>
+              <a:spcBef>
+                <a:spcPts val="500"/>
+              </a:spcBef>
+              <a:buFont typeface="Arial" panose="020B0604020202020204" pitchFamily="34" charset="0"/>
+              <a:buChar char="•"/>
+              <a:defRPr sz="1800" kern="1200">
+                <a:solidFill>
+                  <a:schemeClr val="tx1"/>
+                </a:solidFill>
+                <a:latin typeface="+mn-lt"/>
+                <a:ea typeface="+mn-ea"/>
+                <a:cs typeface="+mn-cs"/>
+              </a:defRPr>
+            </a:lvl7pPr>
+            <a:lvl8pPr marL="3429000" indent="-228600" algn="l" defTabSz="914400" rtl="0" eaLnBrk="1" latinLnBrk="0" hangingPunct="1">
+              <a:lnSpc>
+                <a:spcPct val="90000"/>
+              </a:lnSpc>
+              <a:spcBef>
+                <a:spcPts val="500"/>
+              </a:spcBef>
+              <a:buFont typeface="Arial" panose="020B0604020202020204" pitchFamily="34" charset="0"/>
+              <a:buChar char="•"/>
+              <a:defRPr sz="1800" kern="1200">
+                <a:solidFill>
+                  <a:schemeClr val="tx1"/>
+                </a:solidFill>
+                <a:latin typeface="+mn-lt"/>
+                <a:ea typeface="+mn-ea"/>
+                <a:cs typeface="+mn-cs"/>
+              </a:defRPr>
+            </a:lvl8pPr>
+            <a:lvl9pPr marL="3886200" indent="-228600" algn="l" defTabSz="914400" rtl="0" eaLnBrk="1" latinLnBrk="0" hangingPunct="1">
+              <a:lnSpc>
+                <a:spcPct val="90000"/>
+              </a:lnSpc>
+              <a:spcBef>
+                <a:spcPts val="500"/>
+              </a:spcBef>
+              <a:buFont typeface="Arial" panose="020B0604020202020204" pitchFamily="34" charset="0"/>
+              <a:buChar char="•"/>
+              <a:defRPr sz="1800" kern="1200">
+                <a:solidFill>
+                  <a:schemeClr val="tx1"/>
+                </a:solidFill>
+                <a:latin typeface="+mn-lt"/>
+                <a:ea typeface="+mn-ea"/>
+                <a:cs typeface="+mn-cs"/>
+              </a:defRPr>
+            </a:lvl9pPr>
+          </a:lstStyle>
           <a:p>
             <a:pPr marL="0" indent="0">
               <a:buNone/>
             </a:pPr>
             <a:r>
-              <a:rPr lang="en-US" dirty="0"/>
-              <a:t>2. Data Quality and Availability:</a:t>
+              <a:rPr lang="en-US" sz="2400" b="1" dirty="0">
+                <a:solidFill>
+                  <a:schemeClr val="accent6">
+                    <a:lumMod val="60000"/>
+                    <a:lumOff val="40000"/>
+                  </a:schemeClr>
+                </a:solidFill>
+              </a:rPr>
+              <a:t>c) Pragmatic Ambiguity</a:t>
             </a:r>
           </a:p>
           <a:p>
@@ -5768,33 +5564,61 @@
               <a:buNone/>
             </a:pPr>
             <a:r>
-              <a:rPr lang="en-US" b="1" dirty="0"/>
-              <a:t>Issue: </a:t>
-            </a:r>
-            <a:r>
-              <a:rPr lang="en-US" dirty="0"/>
-              <a:t>NLP models rely on large amounts of training data, and the quality of this data significantly impacts performance. </a:t>
-            </a:r>
-            <a:r>
-              <a:rPr lang="en-US" b="1" dirty="0"/>
-              <a:t>Noisy, incomplete, or biased data</a:t>
-            </a:r>
-            <a:r>
-              <a:rPr lang="en-US" dirty="0"/>
-              <a:t> can lead to inaccurate results. </a:t>
-            </a:r>
+              <a:rPr lang="en-US" sz="2400" b="1" dirty="0">
+                <a:solidFill>
+                  <a:schemeClr val="accent6">
+                    <a:lumMod val="60000"/>
+                    <a:lumOff val="40000"/>
+                  </a:schemeClr>
+                </a:solidFill>
+              </a:rPr>
+              <a:t>Sentence</a:t>
+            </a:r>
+            <a:r>
+              <a:rPr lang="en-US" sz="2400" dirty="0">
+                <a:solidFill>
+                  <a:schemeClr val="accent6">
+                    <a:lumMod val="60000"/>
+                    <a:lumOff val="40000"/>
+                  </a:schemeClr>
+                </a:solidFill>
+              </a:rPr>
+              <a:t>: </a:t>
+            </a:r>
+            <a:r>
+              <a:rPr lang="en-US" sz="2400" i="1" dirty="0">
+                <a:solidFill>
+                  <a:schemeClr val="accent6">
+                    <a:lumMod val="60000"/>
+                    <a:lumOff val="40000"/>
+                  </a:schemeClr>
+                </a:solidFill>
+              </a:rPr>
+              <a:t>"Can you pass the salt?"</a:t>
+            </a:r>
+            <a:endParaRPr lang="en-US" sz="2400" dirty="0">
+              <a:solidFill>
+                <a:schemeClr val="accent6">
+                  <a:lumMod val="60000"/>
+                  <a:lumOff val="40000"/>
+                </a:schemeClr>
+              </a:solidFill>
+            </a:endParaRPr>
           </a:p>
           <a:p>
             <a:pPr marL="0" indent="0">
               <a:buNone/>
             </a:pPr>
             <a:r>
-              <a:rPr lang="en-US" b="1" dirty="0"/>
-              <a:t>Example: </a:t>
-            </a:r>
-            <a:r>
-              <a:rPr lang="en-US" dirty="0"/>
-              <a:t>Training data with gendered stereotypes can result in NLP models perpetuating biases. </a:t>
+              <a:rPr lang="en-US" sz="2400" dirty="0">
+                <a:solidFill>
+                  <a:schemeClr val="accent6">
+                    <a:lumMod val="60000"/>
+                    <a:lumOff val="40000"/>
+                  </a:schemeClr>
+                </a:solidFill>
+              </a:rPr>
+              <a:t>Literally, it's a yes/no question about ability.</a:t>
             </a:r>
           </a:p>
           <a:p>
@@ -5802,101 +5626,162 @@
               <a:buNone/>
             </a:pPr>
             <a:r>
-              <a:rPr lang="en-US" b="1" dirty="0"/>
-              <a:t>Training Data Example (Biased)</a:t>
+              <a:rPr lang="en-US" sz="2400" dirty="0">
+                <a:solidFill>
+                  <a:schemeClr val="accent6">
+                    <a:lumMod val="60000"/>
+                    <a:lumOff val="40000"/>
+                  </a:schemeClr>
+                </a:solidFill>
+              </a:rPr>
+              <a:t>Pragmatically, it's a polite request to pass the salt.</a:t>
             </a:r>
           </a:p>
           <a:p>
             <a:pPr marL="0" indent="0">
+              <a:buFont typeface="Arial" panose="020B0604020202020204" pitchFamily="34" charset="0"/>
               <a:buNone/>
             </a:pPr>
-            <a:r>
-              <a:rPr lang="en-US" dirty="0"/>
-              <a:t>Suppose a language model is trained on large-scale web data (like Common Crawl) that includes sentences like:</a:t>
-            </a:r>
+            <a:endParaRPr lang="en-US" sz="2400" b="1" dirty="0">
+              <a:solidFill>
+                <a:schemeClr val="accent6">
+                  <a:lumMod val="60000"/>
+                  <a:lumOff val="40000"/>
+                </a:schemeClr>
+              </a:solidFill>
+            </a:endParaRPr>
           </a:p>
           <a:p>
             <a:pPr marL="0" indent="0">
+              <a:buFont typeface="Arial" panose="020B0604020202020204" pitchFamily="34" charset="0"/>
               <a:buNone/>
             </a:pPr>
             <a:r>
-              <a:rPr lang="en-US" b="1" dirty="0"/>
-              <a:t>"Women are nurses. Men are doctors."</a:t>
-            </a:r>
-            <a:endParaRPr lang="en-US" dirty="0"/>
+              <a:rPr lang="en-US" sz="2400" b="1" dirty="0">
+                <a:solidFill>
+                  <a:schemeClr val="accent6">
+                    <a:lumMod val="60000"/>
+                    <a:lumOff val="40000"/>
+                  </a:schemeClr>
+                </a:solidFill>
+              </a:rPr>
+              <a:t>d) Punctuation ambiguity</a:t>
+            </a:r>
           </a:p>
           <a:p>
             <a:pPr marL="0" indent="0">
+              <a:buFont typeface="Arial" panose="020B0604020202020204" pitchFamily="34" charset="0"/>
               <a:buNone/>
             </a:pPr>
             <a:r>
-              <a:rPr lang="en-US" b="1" dirty="0"/>
-              <a:t>"He is a brilliant scientist." / "She is a beautiful actress."</a:t>
-            </a:r>
-            <a:endParaRPr lang="en-US" dirty="0"/>
+              <a:rPr lang="en-US" sz="2400" dirty="0">
+                <a:solidFill>
+                  <a:schemeClr val="accent6">
+                    <a:lumMod val="60000"/>
+                    <a:lumOff val="40000"/>
+                  </a:schemeClr>
+                </a:solidFill>
+              </a:rPr>
+              <a:t>She found inspiration in cooking, her family, and her dog (right meaning)</a:t>
+            </a:r>
           </a:p>
           <a:p>
             <a:pPr marL="0" indent="0">
+              <a:buFont typeface="Arial" panose="020B0604020202020204" pitchFamily="34" charset="0"/>
               <a:buNone/>
             </a:pPr>
             <a:r>
-              <a:rPr lang="en-US" b="1" dirty="0"/>
-              <a:t>"The secretary scheduled his meeting." / "The boss signed the contract."</a:t>
-            </a:r>
-            <a:endParaRPr lang="en-US" dirty="0"/>
+              <a:rPr lang="en-US" sz="2400" dirty="0">
+                <a:solidFill>
+                  <a:schemeClr val="accent6">
+                    <a:lumMod val="60000"/>
+                    <a:lumOff val="40000"/>
+                  </a:schemeClr>
+                </a:solidFill>
+              </a:rPr>
+              <a:t>She found inspiration in cooking her family and her dog (weird meaning)</a:t>
+            </a:r>
           </a:p>
           <a:p>
             <a:pPr marL="0" indent="0">
+              <a:buFont typeface="Arial" panose="020B0604020202020204" pitchFamily="34" charset="0"/>
               <a:buNone/>
             </a:pPr>
-            <a:r>
-              <a:rPr lang="en-US" dirty="0"/>
-              <a:t>These examples reinforce </a:t>
-            </a:r>
-            <a:r>
-              <a:rPr lang="en-US" b="1" dirty="0"/>
-              <a:t>stereotypical gender roles</a:t>
-            </a:r>
-            <a:r>
-              <a:rPr lang="en-US" dirty="0"/>
-              <a:t> (e.g., associating women with appearance or support roles, and men with intelligence or leadership).</a:t>
-            </a:r>
+            <a:endParaRPr lang="en-US" sz="2400" b="1" dirty="0">
+              <a:solidFill>
+                <a:schemeClr val="accent6">
+                  <a:lumMod val="60000"/>
+                  <a:lumOff val="40000"/>
+                </a:schemeClr>
+              </a:solidFill>
+            </a:endParaRPr>
           </a:p>
           <a:p>
             <a:pPr marL="0" indent="0">
+              <a:buFont typeface="Arial" panose="020B0604020202020204" pitchFamily="34" charset="0"/>
               <a:buNone/>
             </a:pPr>
             <a:r>
-              <a:rPr lang="en-US" dirty="0"/>
-              <a:t>You ask a model: "The doctor went to the hospital because __ was needed."</a:t>
+              <a:rPr lang="en-US" sz="2400" b="1" dirty="0">
+                <a:solidFill>
+                  <a:schemeClr val="accent6">
+                    <a:lumMod val="60000"/>
+                    <a:lumOff val="40000"/>
+                  </a:schemeClr>
+                </a:solidFill>
+              </a:rPr>
+              <a:t>e) Slang</a:t>
             </a:r>
           </a:p>
           <a:p>
             <a:pPr marL="0" indent="0">
+              <a:buFont typeface="Arial" panose="020B0604020202020204" pitchFamily="34" charset="0"/>
               <a:buNone/>
             </a:pPr>
             <a:r>
-              <a:rPr lang="en-US" dirty="0"/>
-              <a:t>It may respond: "he" — even if gender wasn’t specified in the question.</a:t>
+              <a:rPr lang="en-US" sz="2400" dirty="0">
+                <a:solidFill>
+                  <a:schemeClr val="accent6">
+                    <a:lumMod val="60000"/>
+                    <a:lumOff val="40000"/>
+                  </a:schemeClr>
+                </a:solidFill>
+              </a:rPr>
+              <a:t>Sentence: "Dude your pants are on fire!"</a:t>
             </a:r>
           </a:p>
           <a:p>
             <a:pPr marL="0" indent="0">
+              <a:buFont typeface="Arial" panose="020B0604020202020204" pitchFamily="34" charset="0"/>
               <a:buNone/>
             </a:pPr>
-            <a:endParaRPr lang="en-US" dirty="0"/>
+            <a:r>
+              <a:rPr lang="en-US" sz="2400" dirty="0">
+                <a:solidFill>
+                  <a:schemeClr val="accent6">
+                    <a:lumMod val="60000"/>
+                    <a:lumOff val="40000"/>
+                  </a:schemeClr>
+                </a:solidFill>
+              </a:rPr>
+              <a:t>Literal interpretation: pants are on fire.</a:t>
+            </a:r>
           </a:p>
           <a:p>
             <a:pPr marL="0" indent="0">
+              <a:buFont typeface="Arial" panose="020B0604020202020204" pitchFamily="34" charset="0"/>
               <a:buNone/>
             </a:pPr>
             <a:r>
-              <a:rPr lang="en-US" b="1" dirty="0"/>
-              <a:t>Solution: </a:t>
-            </a:r>
-            <a:r>
-              <a:rPr lang="en-US" dirty="0"/>
-              <a:t>Carefully selecting and cleaning training data, and developing techniques to mitigate biases. </a:t>
+              <a:rPr lang="en-US" sz="2400" dirty="0">
+                <a:solidFill>
+                  <a:schemeClr val="accent6">
+                    <a:lumMod val="60000"/>
+                    <a:lumOff val="40000"/>
+                  </a:schemeClr>
+                </a:solidFill>
+              </a:rPr>
+              <a:t>Slang meaning: The pants was amazing or pants have design depicting fire</a:t>
             </a:r>
           </a:p>
         </p:txBody>
@@ -5904,7 +5789,7 @@
     </p:spTree>
     <p:extLst>
       <p:ext uri="{BB962C8B-B14F-4D97-AF65-F5344CB8AC3E}">
-        <p14:creationId xmlns:p14="http://schemas.microsoft.com/office/powerpoint/2010/main" val="658181244"/>
+        <p14:creationId xmlns:p14="http://schemas.microsoft.com/office/powerpoint/2010/main" val="2729229480"/>
       </p:ext>
     </p:extLst>
   </p:cSld>
@@ -5915,6 +5800,797 @@
 </file>
 
 <file path=ppt/slides/slide16.xml><?xml version="1.0" encoding="utf-8"?>
+<p:sld xmlns:a="http://schemas.openxmlformats.org/drawingml/2006/main" xmlns:r="http://schemas.openxmlformats.org/officeDocument/2006/relationships" xmlns:p="http://schemas.openxmlformats.org/presentationml/2006/main">
+  <p:cSld>
+    <p:spTree>
+      <p:nvGrpSpPr>
+        <p:cNvPr id="1" name="">
+          <a:extLst>
+            <a:ext uri="{FF2B5EF4-FFF2-40B4-BE49-F238E27FC236}">
+              <a16:creationId xmlns:a16="http://schemas.microsoft.com/office/drawing/2014/main" id="{DC8A498D-036A-90C7-6E6F-CDEE5F38C2B9}"/>
+            </a:ext>
+          </a:extLst>
+        </p:cNvPr>
+        <p:cNvGrpSpPr/>
+        <p:nvPr/>
+      </p:nvGrpSpPr>
+      <p:grpSpPr>
+        <a:xfrm>
+          <a:off x="0" y="0"/>
+          <a:ext cx="0" cy="0"/>
+          <a:chOff x="0" y="0"/>
+          <a:chExt cx="0" cy="0"/>
+        </a:xfrm>
+      </p:grpSpPr>
+      <p:sp>
+        <p:nvSpPr>
+          <p:cNvPr id="5" name="Content Placeholder 2">
+            <a:extLst>
+              <a:ext uri="{FF2B5EF4-FFF2-40B4-BE49-F238E27FC236}">
+                <a16:creationId xmlns:a16="http://schemas.microsoft.com/office/drawing/2014/main" id="{CA5CA420-457A-6D22-13ED-0FC108B4F046}"/>
+              </a:ext>
+            </a:extLst>
+          </p:cNvPr>
+          <p:cNvSpPr txBox="1">
+            <a:spLocks/>
+          </p:cNvSpPr>
+          <p:nvPr/>
+        </p:nvSpPr>
+        <p:spPr>
+          <a:xfrm>
+            <a:off x="201168" y="226306"/>
+            <a:ext cx="11191146" cy="7235198"/>
+          </a:xfrm>
+          <a:prstGeom prst="rect">
+            <a:avLst/>
+          </a:prstGeom>
+        </p:spPr>
+        <p:txBody>
+          <a:bodyPr vert="horz" lIns="91440" tIns="45720" rIns="91440" bIns="45720" rtlCol="0">
+            <a:noAutofit/>
+          </a:bodyPr>
+          <a:lstStyle>
+            <a:lvl1pPr marL="228600" indent="-228600" algn="l" defTabSz="914400" rtl="0" eaLnBrk="1" latinLnBrk="0" hangingPunct="1">
+              <a:lnSpc>
+                <a:spcPct val="90000"/>
+              </a:lnSpc>
+              <a:spcBef>
+                <a:spcPts val="1000"/>
+              </a:spcBef>
+              <a:buFont typeface="Arial" panose="020B0604020202020204" pitchFamily="34" charset="0"/>
+              <a:buChar char="•"/>
+              <a:defRPr sz="2800" kern="1200">
+                <a:solidFill>
+                  <a:schemeClr val="tx1"/>
+                </a:solidFill>
+                <a:latin typeface="+mn-lt"/>
+                <a:ea typeface="+mn-ea"/>
+                <a:cs typeface="+mn-cs"/>
+              </a:defRPr>
+            </a:lvl1pPr>
+            <a:lvl2pPr marL="685800" indent="-228600" algn="l" defTabSz="914400" rtl="0" eaLnBrk="1" latinLnBrk="0" hangingPunct="1">
+              <a:lnSpc>
+                <a:spcPct val="90000"/>
+              </a:lnSpc>
+              <a:spcBef>
+                <a:spcPts val="500"/>
+              </a:spcBef>
+              <a:buFont typeface="Arial" panose="020B0604020202020204" pitchFamily="34" charset="0"/>
+              <a:buChar char="•"/>
+              <a:defRPr sz="2400" kern="1200">
+                <a:solidFill>
+                  <a:schemeClr val="tx1"/>
+                </a:solidFill>
+                <a:latin typeface="+mn-lt"/>
+                <a:ea typeface="+mn-ea"/>
+                <a:cs typeface="+mn-cs"/>
+              </a:defRPr>
+            </a:lvl2pPr>
+            <a:lvl3pPr marL="1143000" indent="-228600" algn="l" defTabSz="914400" rtl="0" eaLnBrk="1" latinLnBrk="0" hangingPunct="1">
+              <a:lnSpc>
+                <a:spcPct val="90000"/>
+              </a:lnSpc>
+              <a:spcBef>
+                <a:spcPts val="500"/>
+              </a:spcBef>
+              <a:buFont typeface="Arial" panose="020B0604020202020204" pitchFamily="34" charset="0"/>
+              <a:buChar char="•"/>
+              <a:defRPr sz="2000" kern="1200">
+                <a:solidFill>
+                  <a:schemeClr val="tx1"/>
+                </a:solidFill>
+                <a:latin typeface="+mn-lt"/>
+                <a:ea typeface="+mn-ea"/>
+                <a:cs typeface="+mn-cs"/>
+              </a:defRPr>
+            </a:lvl3pPr>
+            <a:lvl4pPr marL="1600200" indent="-228600" algn="l" defTabSz="914400" rtl="0" eaLnBrk="1" latinLnBrk="0" hangingPunct="1">
+              <a:lnSpc>
+                <a:spcPct val="90000"/>
+              </a:lnSpc>
+              <a:spcBef>
+                <a:spcPts val="500"/>
+              </a:spcBef>
+              <a:buFont typeface="Arial" panose="020B0604020202020204" pitchFamily="34" charset="0"/>
+              <a:buChar char="•"/>
+              <a:defRPr sz="1800" kern="1200">
+                <a:solidFill>
+                  <a:schemeClr val="tx1"/>
+                </a:solidFill>
+                <a:latin typeface="+mn-lt"/>
+                <a:ea typeface="+mn-ea"/>
+                <a:cs typeface="+mn-cs"/>
+              </a:defRPr>
+            </a:lvl4pPr>
+            <a:lvl5pPr marL="2057400" indent="-228600" algn="l" defTabSz="914400" rtl="0" eaLnBrk="1" latinLnBrk="0" hangingPunct="1">
+              <a:lnSpc>
+                <a:spcPct val="90000"/>
+              </a:lnSpc>
+              <a:spcBef>
+                <a:spcPts val="500"/>
+              </a:spcBef>
+              <a:buFont typeface="Arial" panose="020B0604020202020204" pitchFamily="34" charset="0"/>
+              <a:buChar char="•"/>
+              <a:defRPr sz="1800" kern="1200">
+                <a:solidFill>
+                  <a:schemeClr val="tx1"/>
+                </a:solidFill>
+                <a:latin typeface="+mn-lt"/>
+                <a:ea typeface="+mn-ea"/>
+                <a:cs typeface="+mn-cs"/>
+              </a:defRPr>
+            </a:lvl5pPr>
+            <a:lvl6pPr marL="2514600" indent="-228600" algn="l" defTabSz="914400" rtl="0" eaLnBrk="1" latinLnBrk="0" hangingPunct="1">
+              <a:lnSpc>
+                <a:spcPct val="90000"/>
+              </a:lnSpc>
+              <a:spcBef>
+                <a:spcPts val="500"/>
+              </a:spcBef>
+              <a:buFont typeface="Arial" panose="020B0604020202020204" pitchFamily="34" charset="0"/>
+              <a:buChar char="•"/>
+              <a:defRPr sz="1800" kern="1200">
+                <a:solidFill>
+                  <a:schemeClr val="tx1"/>
+                </a:solidFill>
+                <a:latin typeface="+mn-lt"/>
+                <a:ea typeface="+mn-ea"/>
+                <a:cs typeface="+mn-cs"/>
+              </a:defRPr>
+            </a:lvl6pPr>
+            <a:lvl7pPr marL="2971800" indent="-228600" algn="l" defTabSz="914400" rtl="0" eaLnBrk="1" latinLnBrk="0" hangingPunct="1">
+              <a:lnSpc>
+                <a:spcPct val="90000"/>
+              </a:lnSpc>
+              <a:spcBef>
+                <a:spcPts val="500"/>
+              </a:spcBef>
+              <a:buFont typeface="Arial" panose="020B0604020202020204" pitchFamily="34" charset="0"/>
+              <a:buChar char="•"/>
+              <a:defRPr sz="1800" kern="1200">
+                <a:solidFill>
+                  <a:schemeClr val="tx1"/>
+                </a:solidFill>
+                <a:latin typeface="+mn-lt"/>
+                <a:ea typeface="+mn-ea"/>
+                <a:cs typeface="+mn-cs"/>
+              </a:defRPr>
+            </a:lvl7pPr>
+            <a:lvl8pPr marL="3429000" indent="-228600" algn="l" defTabSz="914400" rtl="0" eaLnBrk="1" latinLnBrk="0" hangingPunct="1">
+              <a:lnSpc>
+                <a:spcPct val="90000"/>
+              </a:lnSpc>
+              <a:spcBef>
+                <a:spcPts val="500"/>
+              </a:spcBef>
+              <a:buFont typeface="Arial" panose="020B0604020202020204" pitchFamily="34" charset="0"/>
+              <a:buChar char="•"/>
+              <a:defRPr sz="1800" kern="1200">
+                <a:solidFill>
+                  <a:schemeClr val="tx1"/>
+                </a:solidFill>
+                <a:latin typeface="+mn-lt"/>
+                <a:ea typeface="+mn-ea"/>
+                <a:cs typeface="+mn-cs"/>
+              </a:defRPr>
+            </a:lvl8pPr>
+            <a:lvl9pPr marL="3886200" indent="-228600" algn="l" defTabSz="914400" rtl="0" eaLnBrk="1" latinLnBrk="0" hangingPunct="1">
+              <a:lnSpc>
+                <a:spcPct val="90000"/>
+              </a:lnSpc>
+              <a:spcBef>
+                <a:spcPts val="500"/>
+              </a:spcBef>
+              <a:buFont typeface="Arial" panose="020B0604020202020204" pitchFamily="34" charset="0"/>
+              <a:buChar char="•"/>
+              <a:defRPr sz="1800" kern="1200">
+                <a:solidFill>
+                  <a:schemeClr val="tx1"/>
+                </a:solidFill>
+                <a:latin typeface="+mn-lt"/>
+                <a:ea typeface="+mn-ea"/>
+                <a:cs typeface="+mn-cs"/>
+              </a:defRPr>
+            </a:lvl9pPr>
+          </a:lstStyle>
+          <a:p>
+            <a:pPr marL="0" indent="0">
+              <a:buNone/>
+            </a:pPr>
+            <a:r>
+              <a:rPr lang="en-US" sz="2400" b="1" dirty="0">
+                <a:solidFill>
+                  <a:schemeClr val="accent6">
+                    <a:lumMod val="60000"/>
+                    <a:lumOff val="40000"/>
+                  </a:schemeClr>
+                </a:solidFill>
+              </a:rPr>
+              <a:t>f) Sarcasm Ambiguity</a:t>
+            </a:r>
+          </a:p>
+          <a:p>
+            <a:pPr marL="0" indent="0">
+              <a:buNone/>
+            </a:pPr>
+            <a:r>
+              <a:rPr lang="en-US" sz="2400" i="1" dirty="0">
+                <a:solidFill>
+                  <a:schemeClr val="accent6">
+                    <a:lumMod val="60000"/>
+                    <a:lumOff val="40000"/>
+                  </a:schemeClr>
+                </a:solidFill>
+              </a:rPr>
+              <a:t>"Oh great, another Monday. I’m so excited."</a:t>
+            </a:r>
+            <a:endParaRPr lang="en-US" sz="2400" dirty="0">
+              <a:solidFill>
+                <a:schemeClr val="accent6">
+                  <a:lumMod val="60000"/>
+                  <a:lumOff val="40000"/>
+                </a:schemeClr>
+              </a:solidFill>
+            </a:endParaRPr>
+          </a:p>
+          <a:p>
+            <a:pPr marL="0" indent="0">
+              <a:buNone/>
+            </a:pPr>
+            <a:r>
+              <a:rPr lang="en-US" sz="2400" dirty="0">
+                <a:solidFill>
+                  <a:schemeClr val="accent6">
+                    <a:lumMod val="60000"/>
+                    <a:lumOff val="40000"/>
+                  </a:schemeClr>
+                </a:solidFill>
+              </a:rPr>
+              <a:t>Literal meaning: The speaker is excited.</a:t>
+            </a:r>
+          </a:p>
+          <a:p>
+            <a:pPr marL="0" indent="0">
+              <a:buNone/>
+            </a:pPr>
+            <a:r>
+              <a:rPr lang="en-US" sz="2400" dirty="0">
+                <a:solidFill>
+                  <a:schemeClr val="accent6">
+                    <a:lumMod val="60000"/>
+                    <a:lumOff val="40000"/>
+                  </a:schemeClr>
+                </a:solidFill>
+              </a:rPr>
+              <a:t>Actual (sarcastic) meaning: The speaker dreads it.</a:t>
+            </a:r>
+          </a:p>
+          <a:p>
+            <a:pPr marL="0" indent="0">
+              <a:buNone/>
+            </a:pPr>
+            <a:endParaRPr lang="en-US" sz="2400" b="1" dirty="0">
+              <a:solidFill>
+                <a:schemeClr val="accent6">
+                  <a:lumMod val="60000"/>
+                  <a:lumOff val="40000"/>
+                </a:schemeClr>
+              </a:solidFill>
+            </a:endParaRPr>
+          </a:p>
+          <a:p>
+            <a:pPr marL="0" indent="0">
+              <a:buNone/>
+            </a:pPr>
+            <a:r>
+              <a:rPr lang="en-US" sz="2400" b="1" dirty="0">
+                <a:solidFill>
+                  <a:schemeClr val="accent6">
+                    <a:lumMod val="60000"/>
+                    <a:lumOff val="40000"/>
+                  </a:schemeClr>
+                </a:solidFill>
+              </a:rPr>
+              <a:t>g) Spelling mistake:</a:t>
+            </a:r>
+          </a:p>
+          <a:p>
+            <a:pPr marL="0" indent="0">
+              <a:buNone/>
+            </a:pPr>
+            <a:r>
+              <a:rPr lang="en-US" sz="2400" dirty="0">
+                <a:solidFill>
+                  <a:schemeClr val="accent6">
+                    <a:lumMod val="60000"/>
+                    <a:lumOff val="40000"/>
+                  </a:schemeClr>
+                </a:solidFill>
+              </a:rPr>
+              <a:t>"I cleaned the horse all morning.“….meant house</a:t>
+            </a:r>
+          </a:p>
+        </p:txBody>
+      </p:sp>
+    </p:spTree>
+    <p:extLst>
+      <p:ext uri="{BB962C8B-B14F-4D97-AF65-F5344CB8AC3E}">
+        <p14:creationId xmlns:p14="http://schemas.microsoft.com/office/powerpoint/2010/main" val="2413311315"/>
+      </p:ext>
+    </p:extLst>
+  </p:cSld>
+  <p:clrMapOvr>
+    <a:masterClrMapping/>
+  </p:clrMapOvr>
+</p:sld>
+</file>
+
+<file path=ppt/slides/slide17.xml><?xml version="1.0" encoding="utf-8"?>
+<p:sld xmlns:a="http://schemas.openxmlformats.org/drawingml/2006/main" xmlns:r="http://schemas.openxmlformats.org/officeDocument/2006/relationships" xmlns:p="http://schemas.openxmlformats.org/presentationml/2006/main">
+  <p:cSld>
+    <p:spTree>
+      <p:nvGrpSpPr>
+        <p:cNvPr id="1" name="">
+          <a:extLst>
+            <a:ext uri="{FF2B5EF4-FFF2-40B4-BE49-F238E27FC236}">
+              <a16:creationId xmlns:a16="http://schemas.microsoft.com/office/drawing/2014/main" id="{206CDE61-8147-0BA6-D9AF-E2D7D09A90AA}"/>
+            </a:ext>
+          </a:extLst>
+        </p:cNvPr>
+        <p:cNvGrpSpPr/>
+        <p:nvPr/>
+      </p:nvGrpSpPr>
+      <p:grpSpPr>
+        <a:xfrm>
+          <a:off x="0" y="0"/>
+          <a:ext cx="0" cy="0"/>
+          <a:chOff x="0" y="0"/>
+          <a:chExt cx="0" cy="0"/>
+        </a:xfrm>
+      </p:grpSpPr>
+      <p:sp>
+        <p:nvSpPr>
+          <p:cNvPr id="7" name="TextBox 6">
+            <a:extLst>
+              <a:ext uri="{FF2B5EF4-FFF2-40B4-BE49-F238E27FC236}">
+                <a16:creationId xmlns:a16="http://schemas.microsoft.com/office/drawing/2014/main" id="{AAA38AB1-1C14-B3B5-62A9-015FDE532611}"/>
+              </a:ext>
+            </a:extLst>
+          </p:cNvPr>
+          <p:cNvSpPr txBox="1"/>
+          <p:nvPr/>
+        </p:nvSpPr>
+        <p:spPr>
+          <a:xfrm>
+            <a:off x="73152" y="197346"/>
+            <a:ext cx="11996928" cy="3416320"/>
+          </a:xfrm>
+          <a:prstGeom prst="rect">
+            <a:avLst/>
+          </a:prstGeom>
+          <a:noFill/>
+        </p:spPr>
+        <p:txBody>
+          <a:bodyPr wrap="square">
+            <a:spAutoFit/>
+          </a:bodyPr>
+          <a:lstStyle/>
+          <a:p>
+            <a:pPr marL="0" indent="0">
+              <a:buNone/>
+            </a:pPr>
+            <a:r>
+              <a:rPr lang="en-US" sz="2400" dirty="0">
+                <a:solidFill>
+                  <a:schemeClr val="accent6">
+                    <a:lumMod val="60000"/>
+                    <a:lumOff val="40000"/>
+                  </a:schemeClr>
+                </a:solidFill>
+              </a:rPr>
+              <a:t>2. Data Quality and Availability:</a:t>
+            </a:r>
+          </a:p>
+          <a:p>
+            <a:pPr marL="0" indent="0">
+              <a:buNone/>
+            </a:pPr>
+            <a:endParaRPr lang="en-US" sz="2400" dirty="0">
+              <a:solidFill>
+                <a:schemeClr val="accent6">
+                  <a:lumMod val="60000"/>
+                  <a:lumOff val="40000"/>
+                </a:schemeClr>
+              </a:solidFill>
+            </a:endParaRPr>
+          </a:p>
+          <a:p>
+            <a:pPr marL="0" indent="0">
+              <a:buNone/>
+            </a:pPr>
+            <a:r>
+              <a:rPr lang="en-US" sz="2400" b="1" dirty="0">
+                <a:solidFill>
+                  <a:schemeClr val="accent6">
+                    <a:lumMod val="60000"/>
+                    <a:lumOff val="40000"/>
+                  </a:schemeClr>
+                </a:solidFill>
+              </a:rPr>
+              <a:t>Issue: </a:t>
+            </a:r>
+            <a:r>
+              <a:rPr lang="en-US" sz="2400" dirty="0">
+                <a:solidFill>
+                  <a:schemeClr val="accent6">
+                    <a:lumMod val="60000"/>
+                    <a:lumOff val="40000"/>
+                  </a:schemeClr>
+                </a:solidFill>
+              </a:rPr>
+              <a:t>NLP models rely on large amounts of training data, and the quality of this data significantly impacts performance. </a:t>
+            </a:r>
+          </a:p>
+          <a:p>
+            <a:pPr marL="0" indent="0">
+              <a:buNone/>
+            </a:pPr>
+            <a:r>
+              <a:rPr lang="en-US" sz="2400" b="1" dirty="0">
+                <a:solidFill>
+                  <a:schemeClr val="accent6">
+                    <a:lumMod val="60000"/>
+                    <a:lumOff val="40000"/>
+                  </a:schemeClr>
+                </a:solidFill>
+              </a:rPr>
+              <a:t>Noisy, incomplete, or biased data</a:t>
+            </a:r>
+            <a:r>
+              <a:rPr lang="en-US" sz="2400" dirty="0">
+                <a:solidFill>
+                  <a:schemeClr val="accent6">
+                    <a:lumMod val="60000"/>
+                    <a:lumOff val="40000"/>
+                  </a:schemeClr>
+                </a:solidFill>
+              </a:rPr>
+              <a:t> can lead to inaccurate results. </a:t>
+            </a:r>
+          </a:p>
+          <a:p>
+            <a:pPr marL="0" indent="0">
+              <a:buNone/>
+            </a:pPr>
+            <a:endParaRPr lang="en-US" sz="2400" dirty="0">
+              <a:solidFill>
+                <a:schemeClr val="accent6">
+                  <a:lumMod val="60000"/>
+                  <a:lumOff val="40000"/>
+                </a:schemeClr>
+              </a:solidFill>
+            </a:endParaRPr>
+          </a:p>
+          <a:p>
+            <a:pPr marL="0" indent="0">
+              <a:buNone/>
+            </a:pPr>
+            <a:r>
+              <a:rPr lang="en-US" sz="2400" b="1" dirty="0">
+                <a:solidFill>
+                  <a:schemeClr val="accent6">
+                    <a:lumMod val="60000"/>
+                    <a:lumOff val="40000"/>
+                  </a:schemeClr>
+                </a:solidFill>
+              </a:rPr>
+              <a:t>Example: </a:t>
+            </a:r>
+            <a:r>
+              <a:rPr lang="en-US" sz="2400" dirty="0">
+                <a:solidFill>
+                  <a:schemeClr val="accent6">
+                    <a:lumMod val="60000"/>
+                    <a:lumOff val="40000"/>
+                  </a:schemeClr>
+                </a:solidFill>
+              </a:rPr>
+              <a:t>Training data with gendered stereotypes can result in NLP models perpetuating biases. </a:t>
+            </a:r>
+          </a:p>
+          <a:p>
+            <a:pPr marL="0" indent="0">
+              <a:buNone/>
+            </a:pPr>
+            <a:endParaRPr lang="en-US" sz="2400" b="1" dirty="0">
+              <a:solidFill>
+                <a:schemeClr val="accent6">
+                  <a:lumMod val="60000"/>
+                  <a:lumOff val="40000"/>
+                </a:schemeClr>
+              </a:solidFill>
+            </a:endParaRPr>
+          </a:p>
+        </p:txBody>
+      </p:sp>
+    </p:spTree>
+    <p:extLst>
+      <p:ext uri="{BB962C8B-B14F-4D97-AF65-F5344CB8AC3E}">
+        <p14:creationId xmlns:p14="http://schemas.microsoft.com/office/powerpoint/2010/main" val="596330349"/>
+      </p:ext>
+    </p:extLst>
+  </p:cSld>
+  <p:clrMapOvr>
+    <a:masterClrMapping/>
+  </p:clrMapOvr>
+</p:sld>
+</file>
+
+<file path=ppt/slides/slide18.xml><?xml version="1.0" encoding="utf-8"?>
+<p:sld xmlns:a="http://schemas.openxmlformats.org/drawingml/2006/main" xmlns:r="http://schemas.openxmlformats.org/officeDocument/2006/relationships" xmlns:p="http://schemas.openxmlformats.org/presentationml/2006/main">
+  <p:cSld>
+    <p:spTree>
+      <p:nvGrpSpPr>
+        <p:cNvPr id="1" name="">
+          <a:extLst>
+            <a:ext uri="{FF2B5EF4-FFF2-40B4-BE49-F238E27FC236}">
+              <a16:creationId xmlns:a16="http://schemas.microsoft.com/office/drawing/2014/main" id="{C47E4201-D67D-4058-736E-7B947F73FC4B}"/>
+            </a:ext>
+          </a:extLst>
+        </p:cNvPr>
+        <p:cNvGrpSpPr/>
+        <p:nvPr/>
+      </p:nvGrpSpPr>
+      <p:grpSpPr>
+        <a:xfrm>
+          <a:off x="0" y="0"/>
+          <a:ext cx="0" cy="0"/>
+          <a:chOff x="0" y="0"/>
+          <a:chExt cx="0" cy="0"/>
+        </a:xfrm>
+      </p:grpSpPr>
+      <p:sp>
+        <p:nvSpPr>
+          <p:cNvPr id="7" name="TextBox 6">
+            <a:extLst>
+              <a:ext uri="{FF2B5EF4-FFF2-40B4-BE49-F238E27FC236}">
+                <a16:creationId xmlns:a16="http://schemas.microsoft.com/office/drawing/2014/main" id="{CD3A4745-7E31-85A2-F2CE-83847A22C4E8}"/>
+              </a:ext>
+            </a:extLst>
+          </p:cNvPr>
+          <p:cNvSpPr txBox="1"/>
+          <p:nvPr/>
+        </p:nvSpPr>
+        <p:spPr>
+          <a:xfrm>
+            <a:off x="73152" y="197346"/>
+            <a:ext cx="11996928" cy="4893647"/>
+          </a:xfrm>
+          <a:prstGeom prst="rect">
+            <a:avLst/>
+          </a:prstGeom>
+          <a:noFill/>
+        </p:spPr>
+        <p:txBody>
+          <a:bodyPr wrap="square">
+            <a:spAutoFit/>
+          </a:bodyPr>
+          <a:lstStyle/>
+          <a:p>
+            <a:pPr marL="0" indent="0">
+              <a:buNone/>
+            </a:pPr>
+            <a:r>
+              <a:rPr lang="en-US" sz="2400" b="1" dirty="0">
+                <a:solidFill>
+                  <a:schemeClr val="accent6">
+                    <a:lumMod val="60000"/>
+                    <a:lumOff val="40000"/>
+                  </a:schemeClr>
+                </a:solidFill>
+              </a:rPr>
+              <a:t>Training Data Example (Biased)</a:t>
+            </a:r>
+          </a:p>
+          <a:p>
+            <a:pPr marL="0" indent="0">
+              <a:buNone/>
+            </a:pPr>
+            <a:r>
+              <a:rPr lang="en-US" sz="2400" dirty="0">
+                <a:solidFill>
+                  <a:schemeClr val="accent6">
+                    <a:lumMod val="60000"/>
+                    <a:lumOff val="40000"/>
+                  </a:schemeClr>
+                </a:solidFill>
+              </a:rPr>
+              <a:t>Suppose a language model is trained on large-scale web data (like Common Crawl) that includes sentences like:</a:t>
+            </a:r>
+          </a:p>
+          <a:p>
+            <a:pPr marL="0" indent="0">
+              <a:buNone/>
+            </a:pPr>
+            <a:r>
+              <a:rPr lang="en-US" sz="2400" b="1" dirty="0">
+                <a:solidFill>
+                  <a:schemeClr val="accent6">
+                    <a:lumMod val="60000"/>
+                    <a:lumOff val="40000"/>
+                  </a:schemeClr>
+                </a:solidFill>
+              </a:rPr>
+              <a:t>"Women are nurses. Men are doctors. He is a brilliant scientist. She is a beautiful actress. The secretary scheduled his meeting. The boss signed the contract."</a:t>
+            </a:r>
+            <a:endParaRPr lang="en-US" sz="2400" dirty="0">
+              <a:solidFill>
+                <a:schemeClr val="accent6">
+                  <a:lumMod val="60000"/>
+                  <a:lumOff val="40000"/>
+                </a:schemeClr>
+              </a:solidFill>
+            </a:endParaRPr>
+          </a:p>
+          <a:p>
+            <a:pPr marL="0" indent="0">
+              <a:buNone/>
+            </a:pPr>
+            <a:r>
+              <a:rPr lang="en-US" sz="2400" dirty="0">
+                <a:solidFill>
+                  <a:schemeClr val="accent6">
+                    <a:lumMod val="60000"/>
+                    <a:lumOff val="40000"/>
+                  </a:schemeClr>
+                </a:solidFill>
+              </a:rPr>
+              <a:t>These examples reinforce </a:t>
+            </a:r>
+            <a:r>
+              <a:rPr lang="en-US" sz="2400" b="1" dirty="0">
+                <a:solidFill>
+                  <a:schemeClr val="accent6">
+                    <a:lumMod val="60000"/>
+                    <a:lumOff val="40000"/>
+                  </a:schemeClr>
+                </a:solidFill>
+              </a:rPr>
+              <a:t>stereotypical gender roles</a:t>
+            </a:r>
+            <a:r>
+              <a:rPr lang="en-US" sz="2400" dirty="0">
+                <a:solidFill>
+                  <a:schemeClr val="accent6">
+                    <a:lumMod val="60000"/>
+                    <a:lumOff val="40000"/>
+                  </a:schemeClr>
+                </a:solidFill>
+              </a:rPr>
+              <a:t> (e.g., associating women with appearance or support roles, and men with intelligence or leadership).</a:t>
+            </a:r>
+          </a:p>
+          <a:p>
+            <a:pPr marL="0" indent="0">
+              <a:buNone/>
+            </a:pPr>
+            <a:endParaRPr lang="en-US" sz="2400" dirty="0">
+              <a:solidFill>
+                <a:schemeClr val="accent6">
+                  <a:lumMod val="60000"/>
+                  <a:lumOff val="40000"/>
+                </a:schemeClr>
+              </a:solidFill>
+            </a:endParaRPr>
+          </a:p>
+          <a:p>
+            <a:pPr marL="0" indent="0">
+              <a:buNone/>
+            </a:pPr>
+            <a:r>
+              <a:rPr lang="en-US" sz="2400" dirty="0">
+                <a:solidFill>
+                  <a:schemeClr val="accent6">
+                    <a:lumMod val="60000"/>
+                    <a:lumOff val="40000"/>
+                  </a:schemeClr>
+                </a:solidFill>
+              </a:rPr>
+              <a:t>You ask a model: "The doctor went to the hospital because __ was needed."</a:t>
+            </a:r>
+          </a:p>
+          <a:p>
+            <a:pPr marL="0" indent="0">
+              <a:buNone/>
+            </a:pPr>
+            <a:r>
+              <a:rPr lang="en-US" sz="2400" dirty="0">
+                <a:solidFill>
+                  <a:schemeClr val="accent6">
+                    <a:lumMod val="60000"/>
+                    <a:lumOff val="40000"/>
+                  </a:schemeClr>
+                </a:solidFill>
+              </a:rPr>
+              <a:t>It may respond: "he" — even if gender wasn’t specified in the question.</a:t>
+            </a:r>
+          </a:p>
+          <a:p>
+            <a:pPr marL="0" indent="0">
+              <a:buNone/>
+            </a:pPr>
+            <a:endParaRPr lang="en-US" sz="2400" dirty="0">
+              <a:solidFill>
+                <a:schemeClr val="accent6">
+                  <a:lumMod val="60000"/>
+                  <a:lumOff val="40000"/>
+                </a:schemeClr>
+              </a:solidFill>
+            </a:endParaRPr>
+          </a:p>
+          <a:p>
+            <a:pPr marL="0" indent="0">
+              <a:buNone/>
+            </a:pPr>
+            <a:r>
+              <a:rPr lang="en-US" sz="2400" b="1" dirty="0">
+                <a:solidFill>
+                  <a:schemeClr val="accent6">
+                    <a:lumMod val="60000"/>
+                    <a:lumOff val="40000"/>
+                  </a:schemeClr>
+                </a:solidFill>
+              </a:rPr>
+              <a:t>Solution: </a:t>
+            </a:r>
+            <a:r>
+              <a:rPr lang="en-US" sz="2400" dirty="0">
+                <a:solidFill>
+                  <a:schemeClr val="accent6">
+                    <a:lumMod val="60000"/>
+                    <a:lumOff val="40000"/>
+                  </a:schemeClr>
+                </a:solidFill>
+              </a:rPr>
+              <a:t>Carefully selecting and cleaning training data, and developing techniques to mitigate biases. </a:t>
+            </a:r>
+          </a:p>
+        </p:txBody>
+      </p:sp>
+    </p:spTree>
+    <p:extLst>
+      <p:ext uri="{BB962C8B-B14F-4D97-AF65-F5344CB8AC3E}">
+        <p14:creationId xmlns:p14="http://schemas.microsoft.com/office/powerpoint/2010/main" val="1554506376"/>
+      </p:ext>
+    </p:extLst>
+  </p:cSld>
+  <p:clrMapOvr>
+    <a:masterClrMapping/>
+  </p:clrMapOvr>
+</p:sld>
+</file>
+
+<file path=ppt/slides/slide19.xml><?xml version="1.0" encoding="utf-8"?>
 <p:sld xmlns:a="http://schemas.openxmlformats.org/drawingml/2006/main" xmlns:r="http://schemas.openxmlformats.org/officeDocument/2006/relationships" xmlns:p="http://schemas.openxmlformats.org/presentationml/2006/main">
   <p:cSld>
     <p:spTree>
@@ -5933,354 +6609,10 @@
       </p:grpSpPr>
       <p:sp>
         <p:nvSpPr>
-          <p:cNvPr id="2" name="Title 1"/>
-          <p:cNvSpPr>
-            <a:spLocks noGrp="1"/>
-          </p:cNvSpPr>
-          <p:nvPr>
-            <p:ph type="title"/>
-          </p:nvPr>
-        </p:nvSpPr>
-        <p:spPr>
-          <a:xfrm>
-            <a:off x="838200" y="365126"/>
-            <a:ext cx="5319319" cy="675110"/>
-          </a:xfrm>
-        </p:spPr>
-        <p:txBody>
-          <a:bodyPr>
-            <a:normAutofit fontScale="90000"/>
-          </a:bodyPr>
-          <a:lstStyle/>
-          <a:p>
-            <a:r>
-              <a:rPr lang="en-US" dirty="0"/>
-              <a:t>NLP challenges(p4)</a:t>
-            </a:r>
-          </a:p>
-        </p:txBody>
-      </p:sp>
-      <p:sp>
-        <p:nvSpPr>
-          <p:cNvPr id="3" name="Content Placeholder 2"/>
-          <p:cNvSpPr>
-            <a:spLocks noGrp="1"/>
-          </p:cNvSpPr>
-          <p:nvPr>
-            <p:ph idx="1"/>
-          </p:nvPr>
-        </p:nvSpPr>
-        <p:spPr>
-          <a:xfrm>
-            <a:off x="318781" y="1481676"/>
-            <a:ext cx="11610363" cy="4351338"/>
-          </a:xfrm>
-        </p:spPr>
-        <p:txBody>
-          <a:bodyPr>
-            <a:normAutofit fontScale="85000" lnSpcReduction="10000"/>
-          </a:bodyPr>
-          <a:lstStyle/>
-          <a:p>
-            <a:pPr marL="0" indent="0">
-              <a:buNone/>
-            </a:pPr>
-            <a:r>
-              <a:rPr lang="en-US" dirty="0"/>
-              <a:t>3. Evolving Language:</a:t>
-            </a:r>
-          </a:p>
-          <a:p>
-            <a:pPr marL="0" indent="0">
-              <a:buNone/>
-            </a:pPr>
-            <a:r>
-              <a:rPr lang="en-US" b="1" dirty="0"/>
-              <a:t>Issue:</a:t>
-            </a:r>
-            <a:r>
-              <a:rPr lang="en-US" dirty="0"/>
-              <a:t> Languages are constantly evolving, with new words, idioms, and slang emerging. NLP systems need to adapt to these changes.</a:t>
-            </a:r>
-          </a:p>
-          <a:p>
-            <a:pPr marL="0" indent="0">
-              <a:buNone/>
-            </a:pPr>
-            <a:r>
-              <a:rPr lang="en-US" b="1" dirty="0"/>
-              <a:t>Example:</a:t>
-            </a:r>
-            <a:r>
-              <a:rPr lang="en-US" dirty="0"/>
-              <a:t> New slang terms and internet memes need to be understood by NLP systems.</a:t>
-            </a:r>
-          </a:p>
-          <a:p>
-            <a:pPr marL="0" indent="0">
-              <a:buNone/>
-            </a:pPr>
-            <a:r>
-              <a:rPr lang="en-US" dirty="0"/>
-              <a:t>“Flex”:</a:t>
-            </a:r>
-          </a:p>
-          <a:p>
-            <a:pPr marL="0" indent="0">
-              <a:buNone/>
-            </a:pPr>
-            <a:r>
-              <a:rPr lang="en-US" dirty="0"/>
-              <a:t>Old meaning: To "flex" meant to bend a muscle.</a:t>
-            </a:r>
-          </a:p>
-          <a:p>
-            <a:pPr marL="0" indent="0">
-              <a:buNone/>
-            </a:pPr>
-            <a:r>
-              <a:rPr lang="en-US" dirty="0"/>
-              <a:t>New meaning: "Flex" in modern slang refers to showing off or boasting (e.g., "He’s flexing his new car.").</a:t>
-            </a:r>
-          </a:p>
-          <a:p>
-            <a:pPr marL="0" indent="0">
-              <a:buNone/>
-            </a:pPr>
-            <a:r>
-              <a:rPr lang="en-US" b="1" dirty="0"/>
-              <a:t>Solution:</a:t>
-            </a:r>
-            <a:r>
-              <a:rPr lang="en-US" dirty="0"/>
-              <a:t> Developing NLP techniques that can adapt to evolving language and incorporating knowledge from online resources. </a:t>
-            </a:r>
-            <a:r>
-              <a:rPr lang="en-US" b="1" dirty="0"/>
-              <a:t> </a:t>
-            </a:r>
-            <a:r>
-              <a:rPr lang="en-US" dirty="0"/>
-              <a:t>For example </a:t>
-            </a:r>
-            <a:r>
-              <a:rPr lang="en-US" b="1" dirty="0"/>
-              <a:t>regularly update models</a:t>
-            </a:r>
-            <a:r>
-              <a:rPr lang="en-US" dirty="0"/>
-              <a:t> with new language data, particularly from social media, forums, and new books.</a:t>
-            </a:r>
-          </a:p>
-        </p:txBody>
-      </p:sp>
-    </p:spTree>
-    <p:extLst>
-      <p:ext uri="{BB962C8B-B14F-4D97-AF65-F5344CB8AC3E}">
-        <p14:creationId xmlns:p14="http://schemas.microsoft.com/office/powerpoint/2010/main" val="232603318"/>
-      </p:ext>
-    </p:extLst>
-  </p:cSld>
-  <p:clrMapOvr>
-    <a:masterClrMapping/>
-  </p:clrMapOvr>
-</p:sld>
-</file>
-
-<file path=ppt/slides/slide17.xml><?xml version="1.0" encoding="utf-8"?>
-<p:sld xmlns:a="http://schemas.openxmlformats.org/drawingml/2006/main" xmlns:r="http://schemas.openxmlformats.org/officeDocument/2006/relationships" xmlns:p="http://schemas.openxmlformats.org/presentationml/2006/main">
-  <p:cSld>
-    <p:spTree>
-      <p:nvGrpSpPr>
-        <p:cNvPr id="1" name=""/>
-        <p:cNvGrpSpPr/>
-        <p:nvPr/>
-      </p:nvGrpSpPr>
-      <p:grpSpPr>
-        <a:xfrm>
-          <a:off x="0" y="0"/>
-          <a:ext cx="0" cy="0"/>
-          <a:chOff x="0" y="0"/>
-          <a:chExt cx="0" cy="0"/>
-        </a:xfrm>
-      </p:grpSpPr>
-      <p:sp>
-        <p:nvSpPr>
-          <p:cNvPr id="2" name="Title 1"/>
-          <p:cNvSpPr>
-            <a:spLocks noGrp="1"/>
-          </p:cNvSpPr>
-          <p:nvPr>
-            <p:ph type="title"/>
-          </p:nvPr>
-        </p:nvSpPr>
-        <p:spPr>
-          <a:xfrm>
-            <a:off x="838200" y="365126"/>
-            <a:ext cx="5319319" cy="675110"/>
-          </a:xfrm>
-        </p:spPr>
-        <p:txBody>
-          <a:bodyPr>
-            <a:normAutofit fontScale="90000"/>
-          </a:bodyPr>
-          <a:lstStyle/>
-          <a:p>
-            <a:r>
-              <a:rPr lang="en-US" dirty="0"/>
-              <a:t>NLP challenges(p3)</a:t>
-            </a:r>
-          </a:p>
-        </p:txBody>
-      </p:sp>
-      <p:sp>
-        <p:nvSpPr>
-          <p:cNvPr id="3" name="Content Placeholder 2"/>
-          <p:cNvSpPr>
-            <a:spLocks noGrp="1"/>
-          </p:cNvSpPr>
-          <p:nvPr>
-            <p:ph idx="1"/>
-          </p:nvPr>
-        </p:nvSpPr>
-        <p:spPr>
-          <a:xfrm>
-            <a:off x="318781" y="1481676"/>
-            <a:ext cx="11610363" cy="4351338"/>
-          </a:xfrm>
-        </p:spPr>
-        <p:txBody>
-          <a:bodyPr>
-            <a:normAutofit/>
-          </a:bodyPr>
-          <a:lstStyle/>
-          <a:p>
-            <a:pPr marL="0" indent="0">
-              <a:buNone/>
-            </a:pPr>
-            <a:r>
-              <a:rPr lang="en-US" dirty="0"/>
-              <a:t>4. Language Complexity and Diversity:</a:t>
-            </a:r>
-          </a:p>
-          <a:p>
-            <a:pPr marL="0" indent="0" fontAlgn="ctr">
-              <a:buNone/>
-            </a:pPr>
-            <a:r>
-              <a:rPr lang="en-US" b="1" dirty="0"/>
-              <a:t>Issue:</a:t>
-            </a:r>
-            <a:r>
-              <a:rPr lang="en-US" dirty="0"/>
-              <a:t> Languages have varying structures, grammars, and vocabularies. NLP systems need to be able to handle diverse languages and dialects. </a:t>
-            </a:r>
-          </a:p>
-          <a:p>
-            <a:pPr marL="0" indent="0" fontAlgn="ctr">
-              <a:buNone/>
-            </a:pPr>
-            <a:r>
-              <a:rPr lang="en-US" b="1" dirty="0"/>
-              <a:t>Example:</a:t>
-            </a:r>
-            <a:r>
-              <a:rPr lang="en-US" dirty="0"/>
-              <a:t> Languages with complex grammatical structures can be challenging to model. </a:t>
-            </a:r>
-          </a:p>
-          <a:p>
-            <a:pPr marL="0" indent="0">
-              <a:buNone/>
-            </a:pPr>
-            <a:r>
-              <a:rPr lang="en-US" b="1" dirty="0"/>
-              <a:t>Solution:</a:t>
-            </a:r>
-            <a:r>
-              <a:rPr lang="en-US" dirty="0"/>
-              <a:t> Developing models that can generalize across different languages and dialects, and utilizing cross-lingual transfer learning. </a:t>
-            </a:r>
-          </a:p>
-        </p:txBody>
-      </p:sp>
-    </p:spTree>
-    <p:extLst>
-      <p:ext uri="{BB962C8B-B14F-4D97-AF65-F5344CB8AC3E}">
-        <p14:creationId xmlns:p14="http://schemas.microsoft.com/office/powerpoint/2010/main" val="1834884560"/>
-      </p:ext>
-    </p:extLst>
-  </p:cSld>
-  <p:clrMapOvr>
-    <a:masterClrMapping/>
-  </p:clrMapOvr>
-</p:sld>
-</file>
-
-<file path=ppt/slides/slide18.xml><?xml version="1.0" encoding="utf-8"?>
-<p:sld xmlns:a="http://schemas.openxmlformats.org/drawingml/2006/main" xmlns:r="http://schemas.openxmlformats.org/officeDocument/2006/relationships" xmlns:p="http://schemas.openxmlformats.org/presentationml/2006/main">
-  <p:cSld>
-    <p:spTree>
-      <p:nvGrpSpPr>
-        <p:cNvPr id="1" name="">
-          <a:extLst>
-            <a:ext uri="{FF2B5EF4-FFF2-40B4-BE49-F238E27FC236}">
-              <a16:creationId xmlns:a16="http://schemas.microsoft.com/office/drawing/2014/main" id="{D72B165F-3F52-C3BA-058E-030CDA967B2F}"/>
-            </a:ext>
-          </a:extLst>
-        </p:cNvPr>
-        <p:cNvGrpSpPr/>
-        <p:nvPr/>
-      </p:nvGrpSpPr>
-      <p:grpSpPr>
-        <a:xfrm>
-          <a:off x="0" y="0"/>
-          <a:ext cx="0" cy="0"/>
-          <a:chOff x="0" y="0"/>
-          <a:chExt cx="0" cy="0"/>
-        </a:xfrm>
-      </p:grpSpPr>
-      <p:sp>
-        <p:nvSpPr>
-          <p:cNvPr id="2" name="Title 1">
+          <p:cNvPr id="7" name="TextBox 6">
             <a:extLst>
               <a:ext uri="{FF2B5EF4-FFF2-40B4-BE49-F238E27FC236}">
-                <a16:creationId xmlns:a16="http://schemas.microsoft.com/office/drawing/2014/main" id="{7B868C96-9C9D-E585-B77B-D5E5742F1051}"/>
-              </a:ext>
-            </a:extLst>
-          </p:cNvPr>
-          <p:cNvSpPr>
-            <a:spLocks noGrp="1"/>
-          </p:cNvSpPr>
-          <p:nvPr>
-            <p:ph type="title"/>
-          </p:nvPr>
-        </p:nvSpPr>
-        <p:spPr>
-          <a:xfrm>
-            <a:off x="274320" y="136525"/>
-            <a:ext cx="11466576" cy="832739"/>
-          </a:xfrm>
-        </p:spPr>
-        <p:txBody>
-          <a:bodyPr>
-            <a:normAutofit/>
-          </a:bodyPr>
-          <a:lstStyle/>
-          <a:p>
-            <a:r>
-              <a:rPr lang="en-US" sz="3600" dirty="0"/>
-              <a:t>EXTRA</a:t>
-            </a:r>
-          </a:p>
-        </p:txBody>
-      </p:sp>
-      <p:sp>
-        <p:nvSpPr>
-          <p:cNvPr id="4" name="TextBox 3">
-            <a:extLst>
-              <a:ext uri="{FF2B5EF4-FFF2-40B4-BE49-F238E27FC236}">
-                <a16:creationId xmlns:a16="http://schemas.microsoft.com/office/drawing/2014/main" id="{9D9CD109-6B71-237D-3A76-9A4CC0660C9A}"/>
+                <a16:creationId xmlns:a16="http://schemas.microsoft.com/office/drawing/2014/main" id="{20C91265-6E21-B871-EF82-9963DE5D9CEA}"/>
               </a:ext>
             </a:extLst>
           </p:cNvPr>
@@ -6289,8 +6621,8 @@
         </p:nvSpPr>
         <p:spPr>
           <a:xfrm>
-            <a:off x="274320" y="933117"/>
-            <a:ext cx="11658600" cy="646331"/>
+            <a:off x="128016" y="308646"/>
+            <a:ext cx="11439144" cy="6370975"/>
           </a:xfrm>
           <a:prstGeom prst="rect">
             <a:avLst/>
@@ -6307,17 +6639,22 @@
               <a:buNone/>
             </a:pPr>
             <a:r>
-              <a:rPr lang="en-US" dirty="0" err="1">
-                <a:solidFill>
-                  <a:schemeClr val="accent6">
-                    <a:lumMod val="60000"/>
-                    <a:lumOff val="40000"/>
-                  </a:schemeClr>
-                </a:solidFill>
-              </a:rPr>
-              <a:t>Xxxxxxxxxxx</a:t>
-            </a:r>
-            <a:endParaRPr lang="en-US" dirty="0">
+              <a:rPr lang="en-US" sz="2400" dirty="0">
+                <a:solidFill>
+                  <a:schemeClr val="accent6">
+                    <a:lumMod val="60000"/>
+                    <a:lumOff val="40000"/>
+                  </a:schemeClr>
+                </a:solidFill>
+              </a:rPr>
+              <a:t>3. Evolving Language:</a:t>
+            </a:r>
+          </a:p>
+          <a:p>
+            <a:pPr marL="0" indent="0">
+              <a:buNone/>
+            </a:pPr>
+            <a:endParaRPr lang="en-US" sz="2400" dirty="0">
               <a:solidFill>
                 <a:schemeClr val="accent6">
                   <a:lumMod val="60000"/>
@@ -6331,17 +6668,33 @@
               <a:buNone/>
             </a:pPr>
             <a:r>
-              <a:rPr lang="en-US" dirty="0" err="1">
-                <a:solidFill>
-                  <a:schemeClr val="accent6">
-                    <a:lumMod val="60000"/>
-                    <a:lumOff val="40000"/>
-                  </a:schemeClr>
-                </a:solidFill>
-              </a:rPr>
-              <a:t>xxxxxxxxxxxx</a:t>
-            </a:r>
-            <a:endParaRPr lang="en-US" dirty="0">
+              <a:rPr lang="en-US" sz="2400" b="1" dirty="0">
+                <a:solidFill>
+                  <a:schemeClr val="accent6">
+                    <a:lumMod val="60000"/>
+                    <a:lumOff val="40000"/>
+                  </a:schemeClr>
+                </a:solidFill>
+              </a:rPr>
+              <a:t>Issue:</a:t>
+            </a:r>
+            <a:r>
+              <a:rPr lang="en-US" sz="2400" dirty="0">
+                <a:solidFill>
+                  <a:schemeClr val="accent6">
+                    <a:lumMod val="60000"/>
+                    <a:lumOff val="40000"/>
+                  </a:schemeClr>
+                </a:solidFill>
+              </a:rPr>
+              <a:t> Languages are constantly evolving, with new words, idioms, and slang emerging. NLP systems need to adapt to these changes.</a:t>
+            </a:r>
+          </a:p>
+          <a:p>
+            <a:pPr marL="0" indent="0">
+              <a:buNone/>
+            </a:pPr>
+            <a:endParaRPr lang="en-US" sz="2400" dirty="0">
               <a:solidFill>
                 <a:schemeClr val="accent6">
                   <a:lumMod val="60000"/>
@@ -6350,12 +6703,216 @@
               </a:solidFill>
             </a:endParaRPr>
           </a:p>
+          <a:p>
+            <a:pPr marL="0" indent="0">
+              <a:buNone/>
+            </a:pPr>
+            <a:r>
+              <a:rPr lang="en-US" sz="2400" b="1" dirty="0">
+                <a:solidFill>
+                  <a:schemeClr val="accent6">
+                    <a:lumMod val="60000"/>
+                    <a:lumOff val="40000"/>
+                  </a:schemeClr>
+                </a:solidFill>
+              </a:rPr>
+              <a:t>Example:</a:t>
+            </a:r>
+            <a:r>
+              <a:rPr lang="en-US" sz="2400" dirty="0">
+                <a:solidFill>
+                  <a:schemeClr val="accent6">
+                    <a:lumMod val="60000"/>
+                    <a:lumOff val="40000"/>
+                  </a:schemeClr>
+                </a:solidFill>
+              </a:rPr>
+              <a:t> New slang terms and internet memes need to be understood by NLP systems.</a:t>
+            </a:r>
+          </a:p>
+          <a:p>
+            <a:pPr marL="0" indent="0">
+              <a:buNone/>
+            </a:pPr>
+            <a:r>
+              <a:rPr lang="en-US" sz="2400" dirty="0">
+                <a:solidFill>
+                  <a:schemeClr val="accent6">
+                    <a:lumMod val="60000"/>
+                    <a:lumOff val="40000"/>
+                  </a:schemeClr>
+                </a:solidFill>
+              </a:rPr>
+              <a:t>“Flex”:</a:t>
+            </a:r>
+          </a:p>
+          <a:p>
+            <a:pPr marL="0" indent="0">
+              <a:buNone/>
+            </a:pPr>
+            <a:r>
+              <a:rPr lang="en-US" sz="2400" dirty="0">
+                <a:solidFill>
+                  <a:schemeClr val="accent6">
+                    <a:lumMod val="60000"/>
+                    <a:lumOff val="40000"/>
+                  </a:schemeClr>
+                </a:solidFill>
+              </a:rPr>
+              <a:t>Old meaning: To "flex" meant to bend a muscle.</a:t>
+            </a:r>
+          </a:p>
+          <a:p>
+            <a:pPr marL="0" indent="0">
+              <a:buNone/>
+            </a:pPr>
+            <a:r>
+              <a:rPr lang="en-US" sz="2400" dirty="0">
+                <a:solidFill>
+                  <a:schemeClr val="accent6">
+                    <a:lumMod val="60000"/>
+                    <a:lumOff val="40000"/>
+                  </a:schemeClr>
+                </a:solidFill>
+              </a:rPr>
+              <a:t>New meaning: "Flex" in modern slang refers to showing off or boasting (e.g., "He’s flexing his new car.").</a:t>
+            </a:r>
+          </a:p>
+          <a:p>
+            <a:pPr marL="0" indent="0">
+              <a:buNone/>
+            </a:pPr>
+            <a:endParaRPr lang="en-US" sz="2400" b="1" dirty="0">
+              <a:solidFill>
+                <a:schemeClr val="accent6">
+                  <a:lumMod val="60000"/>
+                  <a:lumOff val="40000"/>
+                </a:schemeClr>
+              </a:solidFill>
+            </a:endParaRPr>
+          </a:p>
+          <a:p>
+            <a:pPr marL="0" indent="0">
+              <a:buNone/>
+            </a:pPr>
+            <a:endParaRPr lang="en-US" sz="2400" b="1" dirty="0">
+              <a:solidFill>
+                <a:schemeClr val="accent6">
+                  <a:lumMod val="60000"/>
+                  <a:lumOff val="40000"/>
+                </a:schemeClr>
+              </a:solidFill>
+            </a:endParaRPr>
+          </a:p>
+          <a:p>
+            <a:pPr marL="0" indent="0">
+              <a:buNone/>
+            </a:pPr>
+            <a:r>
+              <a:rPr lang="en-US" sz="2400" b="1" dirty="0">
+                <a:solidFill>
+                  <a:schemeClr val="accent6">
+                    <a:lumMod val="60000"/>
+                    <a:lumOff val="40000"/>
+                  </a:schemeClr>
+                </a:solidFill>
+              </a:rPr>
+              <a:t>Solution:</a:t>
+            </a:r>
+            <a:r>
+              <a:rPr lang="en-US" sz="2400" dirty="0">
+                <a:solidFill>
+                  <a:schemeClr val="accent6">
+                    <a:lumMod val="60000"/>
+                    <a:lumOff val="40000"/>
+                  </a:schemeClr>
+                </a:solidFill>
+              </a:rPr>
+              <a:t> </a:t>
+            </a:r>
+          </a:p>
+          <a:p>
+            <a:pPr marL="0" indent="0">
+              <a:buNone/>
+            </a:pPr>
+            <a:r>
+              <a:rPr lang="en-US" sz="2400" dirty="0">
+                <a:solidFill>
+                  <a:schemeClr val="accent6">
+                    <a:lumMod val="60000"/>
+                    <a:lumOff val="40000"/>
+                  </a:schemeClr>
+                </a:solidFill>
+              </a:rPr>
+              <a:t>Developing NLP techniques that can adapt to evolving language and incorporating knowledge from online resources. </a:t>
+            </a:r>
+            <a:r>
+              <a:rPr lang="en-US" sz="2400" b="1" dirty="0">
+                <a:solidFill>
+                  <a:schemeClr val="accent6">
+                    <a:lumMod val="60000"/>
+                    <a:lumOff val="40000"/>
+                  </a:schemeClr>
+                </a:solidFill>
+              </a:rPr>
+              <a:t> </a:t>
+            </a:r>
+          </a:p>
+          <a:p>
+            <a:pPr marL="0" indent="0">
+              <a:buNone/>
+            </a:pPr>
+            <a:r>
+              <a:rPr lang="en-US" sz="2400" b="1" dirty="0">
+                <a:solidFill>
+                  <a:schemeClr val="accent6">
+                    <a:lumMod val="60000"/>
+                    <a:lumOff val="40000"/>
+                  </a:schemeClr>
+                </a:solidFill>
+              </a:rPr>
+              <a:t>E</a:t>
+            </a:r>
+            <a:r>
+              <a:rPr lang="en-US" sz="2400" dirty="0">
+                <a:solidFill>
+                  <a:schemeClr val="accent6">
+                    <a:lumMod val="60000"/>
+                    <a:lumOff val="40000"/>
+                  </a:schemeClr>
+                </a:solidFill>
+              </a:rPr>
+              <a:t>xample: </a:t>
+            </a:r>
+            <a:r>
+              <a:rPr lang="en-US" sz="2400" b="1" dirty="0">
+                <a:solidFill>
+                  <a:schemeClr val="accent6">
+                    <a:lumMod val="60000"/>
+                    <a:lumOff val="40000"/>
+                  </a:schemeClr>
+                </a:solidFill>
+              </a:rPr>
+              <a:t>regularly update models</a:t>
+            </a:r>
+            <a:r>
+              <a:rPr lang="en-US" sz="2400" dirty="0">
+                <a:solidFill>
+                  <a:schemeClr val="accent6">
+                    <a:lumMod val="60000"/>
+                    <a:lumOff val="40000"/>
+                  </a:schemeClr>
+                </a:solidFill>
+              </a:rPr>
+              <a:t> with new language data, particularly from social media, forums, and new books.</a:t>
+            </a:r>
+          </a:p>
         </p:txBody>
       </p:sp>
     </p:spTree>
     <p:extLst>
       <p:ext uri="{BB962C8B-B14F-4D97-AF65-F5344CB8AC3E}">
-        <p14:creationId xmlns:p14="http://schemas.microsoft.com/office/powerpoint/2010/main" val="3278801424"/>
+        <p14:creationId xmlns:p14="http://schemas.microsoft.com/office/powerpoint/2010/main" val="232603318"/>
       </p:ext>
     </p:extLst>
   </p:cSld>
@@ -6457,6 +7014,184 @@
     <p:extLst>
       <p:ext uri="{BB962C8B-B14F-4D97-AF65-F5344CB8AC3E}">
         <p14:creationId xmlns:p14="http://schemas.microsoft.com/office/powerpoint/2010/main" val="3248632023"/>
+      </p:ext>
+    </p:extLst>
+  </p:cSld>
+  <p:clrMapOvr>
+    <a:masterClrMapping/>
+  </p:clrMapOvr>
+</p:sld>
+</file>
+
+<file path=ppt/slides/slide20.xml><?xml version="1.0" encoding="utf-8"?>
+<p:sld xmlns:a="http://schemas.openxmlformats.org/drawingml/2006/main" xmlns:r="http://schemas.openxmlformats.org/officeDocument/2006/relationships" xmlns:p="http://schemas.openxmlformats.org/presentationml/2006/main">
+  <p:cSld>
+    <p:spTree>
+      <p:nvGrpSpPr>
+        <p:cNvPr id="1" name=""/>
+        <p:cNvGrpSpPr/>
+        <p:nvPr/>
+      </p:nvGrpSpPr>
+      <p:grpSpPr>
+        <a:xfrm>
+          <a:off x="0" y="0"/>
+          <a:ext cx="0" cy="0"/>
+          <a:chOff x="0" y="0"/>
+          <a:chExt cx="0" cy="0"/>
+        </a:xfrm>
+      </p:grpSpPr>
+    </p:spTree>
+    <p:extLst>
+      <p:ext uri="{BB962C8B-B14F-4D97-AF65-F5344CB8AC3E}">
+        <p14:creationId xmlns:p14="http://schemas.microsoft.com/office/powerpoint/2010/main" val="1834884560"/>
+      </p:ext>
+    </p:extLst>
+  </p:cSld>
+  <p:clrMapOvr>
+    <a:masterClrMapping/>
+  </p:clrMapOvr>
+</p:sld>
+</file>
+
+<file path=ppt/slides/slide21.xml><?xml version="1.0" encoding="utf-8"?>
+<p:sld xmlns:a="http://schemas.openxmlformats.org/drawingml/2006/main" xmlns:r="http://schemas.openxmlformats.org/officeDocument/2006/relationships" xmlns:p="http://schemas.openxmlformats.org/presentationml/2006/main">
+  <p:cSld>
+    <p:spTree>
+      <p:nvGrpSpPr>
+        <p:cNvPr id="1" name="">
+          <a:extLst>
+            <a:ext uri="{FF2B5EF4-FFF2-40B4-BE49-F238E27FC236}">
+              <a16:creationId xmlns:a16="http://schemas.microsoft.com/office/drawing/2014/main" id="{D72B165F-3F52-C3BA-058E-030CDA967B2F}"/>
+            </a:ext>
+          </a:extLst>
+        </p:cNvPr>
+        <p:cNvGrpSpPr/>
+        <p:nvPr/>
+      </p:nvGrpSpPr>
+      <p:grpSpPr>
+        <a:xfrm>
+          <a:off x="0" y="0"/>
+          <a:ext cx="0" cy="0"/>
+          <a:chOff x="0" y="0"/>
+          <a:chExt cx="0" cy="0"/>
+        </a:xfrm>
+      </p:grpSpPr>
+      <p:sp>
+        <p:nvSpPr>
+          <p:cNvPr id="2" name="Title 1">
+            <a:extLst>
+              <a:ext uri="{FF2B5EF4-FFF2-40B4-BE49-F238E27FC236}">
+                <a16:creationId xmlns:a16="http://schemas.microsoft.com/office/drawing/2014/main" id="{7B868C96-9C9D-E585-B77B-D5E5742F1051}"/>
+              </a:ext>
+            </a:extLst>
+          </p:cNvPr>
+          <p:cNvSpPr>
+            <a:spLocks noGrp="1"/>
+          </p:cNvSpPr>
+          <p:nvPr>
+            <p:ph type="title"/>
+          </p:nvPr>
+        </p:nvSpPr>
+        <p:spPr>
+          <a:xfrm>
+            <a:off x="274320" y="136525"/>
+            <a:ext cx="11466576" cy="832739"/>
+          </a:xfrm>
+        </p:spPr>
+        <p:txBody>
+          <a:bodyPr>
+            <a:normAutofit/>
+          </a:bodyPr>
+          <a:lstStyle/>
+          <a:p>
+            <a:r>
+              <a:rPr lang="en-US" sz="3600" dirty="0"/>
+              <a:t>EXTRA</a:t>
+            </a:r>
+          </a:p>
+        </p:txBody>
+      </p:sp>
+      <p:sp>
+        <p:nvSpPr>
+          <p:cNvPr id="4" name="TextBox 3">
+            <a:extLst>
+              <a:ext uri="{FF2B5EF4-FFF2-40B4-BE49-F238E27FC236}">
+                <a16:creationId xmlns:a16="http://schemas.microsoft.com/office/drawing/2014/main" id="{9D9CD109-6B71-237D-3A76-9A4CC0660C9A}"/>
+              </a:ext>
+            </a:extLst>
+          </p:cNvPr>
+          <p:cNvSpPr txBox="1"/>
+          <p:nvPr/>
+        </p:nvSpPr>
+        <p:spPr>
+          <a:xfrm>
+            <a:off x="274320" y="933117"/>
+            <a:ext cx="11658600" cy="646331"/>
+          </a:xfrm>
+          <a:prstGeom prst="rect">
+            <a:avLst/>
+          </a:prstGeom>
+          <a:noFill/>
+        </p:spPr>
+        <p:txBody>
+          <a:bodyPr wrap="square">
+            <a:spAutoFit/>
+          </a:bodyPr>
+          <a:lstStyle/>
+          <a:p>
+            <a:pPr marL="0" indent="0">
+              <a:buNone/>
+            </a:pPr>
+            <a:r>
+              <a:rPr lang="en-US" dirty="0" err="1">
+                <a:solidFill>
+                  <a:schemeClr val="accent6">
+                    <a:lumMod val="60000"/>
+                    <a:lumOff val="40000"/>
+                  </a:schemeClr>
+                </a:solidFill>
+              </a:rPr>
+              <a:t>Xxxxxxxxxxx</a:t>
+            </a:r>
+            <a:endParaRPr lang="en-US" dirty="0">
+              <a:solidFill>
+                <a:schemeClr val="accent6">
+                  <a:lumMod val="60000"/>
+                  <a:lumOff val="40000"/>
+                </a:schemeClr>
+              </a:solidFill>
+            </a:endParaRPr>
+          </a:p>
+          <a:p>
+            <a:pPr marL="0" indent="0">
+              <a:buNone/>
+            </a:pPr>
+            <a:r>
+              <a:rPr lang="en-US" dirty="0" err="1">
+                <a:solidFill>
+                  <a:schemeClr val="accent6">
+                    <a:lumMod val="60000"/>
+                    <a:lumOff val="40000"/>
+                  </a:schemeClr>
+                </a:solidFill>
+              </a:rPr>
+              <a:t>xxxxxxxxxxxx</a:t>
+            </a:r>
+            <a:endParaRPr lang="en-US" dirty="0">
+              <a:solidFill>
+                <a:schemeClr val="accent6">
+                  <a:lumMod val="60000"/>
+                  <a:lumOff val="40000"/>
+                </a:schemeClr>
+              </a:solidFill>
+            </a:endParaRPr>
+          </a:p>
+        </p:txBody>
+      </p:sp>
+    </p:spTree>
+    <p:extLst>
+      <p:ext uri="{BB962C8B-B14F-4D97-AF65-F5344CB8AC3E}">
+        <p14:creationId xmlns:p14="http://schemas.microsoft.com/office/powerpoint/2010/main" val="3278801424"/>
       </p:ext>
     </p:extLst>
   </p:cSld>
